--- a/pptx canvas/Lecture3.pptx
+++ b/pptx canvas/Lecture3.pptx
@@ -19,14 +19,14 @@
     <p:sldId id="309" r:id="rId10"/>
     <p:sldId id="310" r:id="rId11"/>
     <p:sldId id="321" r:id="rId12"/>
-    <p:sldId id="322" r:id="rId13"/>
-    <p:sldId id="311" r:id="rId14"/>
-    <p:sldId id="312" r:id="rId15"/>
-    <p:sldId id="313" r:id="rId16"/>
-    <p:sldId id="314" r:id="rId17"/>
-    <p:sldId id="315" r:id="rId18"/>
-    <p:sldId id="316" r:id="rId19"/>
-    <p:sldId id="323" r:id="rId20"/>
+    <p:sldId id="311" r:id="rId13"/>
+    <p:sldId id="312" r:id="rId14"/>
+    <p:sldId id="313" r:id="rId15"/>
+    <p:sldId id="314" r:id="rId16"/>
+    <p:sldId id="315" r:id="rId17"/>
+    <p:sldId id="316" r:id="rId18"/>
+    <p:sldId id="323" r:id="rId19"/>
+    <p:sldId id="324" r:id="rId20"/>
     <p:sldId id="317" r:id="rId21"/>
     <p:sldId id="318" r:id="rId22"/>
     <p:sldId id="319" r:id="rId23"/>
@@ -220,7 +220,7 @@
           <a:p>
             <a:fld id="{4995A223-E7C9-A243-9A70-FE01E1A1DD65}" type="datetimeFigureOut">
               <a:rPr lang="en-US" smtClean="0"/>
-              <a:t>8/24/2026</a:t>
+              <a:t>8/29/2026</a:t>
             </a:fld>
             <a:endParaRPr lang="en-US"/>
           </a:p>
@@ -603,6 +603,1467 @@
 </p:notes>
 </file>
 
+<file path=ppt/notesSlides/notesSlide10.xml><?xml version="1.0" encoding="utf-8"?>
+<p:notes xmlns:a="http://schemas.openxmlformats.org/drawingml/2006/main" xmlns:r="http://schemas.openxmlformats.org/officeDocument/2006/relationships" xmlns:p="http://schemas.openxmlformats.org/presentationml/2006/main">
+  <p:cSld>
+    <p:spTree>
+      <p:nvGrpSpPr>
+        <p:cNvPr id="1" name=""/>
+        <p:cNvGrpSpPr/>
+        <p:nvPr/>
+      </p:nvGrpSpPr>
+      <p:grpSpPr>
+        <a:xfrm>
+          <a:off x="0" y="0"/>
+          <a:ext cx="0" cy="0"/>
+          <a:chOff x="0" y="0"/>
+          <a:chExt cx="0" cy="0"/>
+        </a:xfrm>
+      </p:grpSpPr>
+      <p:sp>
+        <p:nvSpPr>
+          <p:cNvPr id="2" name="Slide Image Placeholder 1"/>
+          <p:cNvSpPr>
+            <a:spLocks noGrp="1" noRot="1" noChangeAspect="1"/>
+          </p:cNvSpPr>
+          <p:nvPr>
+            <p:ph type="sldImg"/>
+          </p:nvPr>
+        </p:nvSpPr>
+        <p:spPr/>
+      </p:sp>
+      <p:sp>
+        <p:nvSpPr>
+          <p:cNvPr id="3" name="Notes Placeholder 2"/>
+          <p:cNvSpPr>
+            <a:spLocks noGrp="1"/>
+          </p:cNvSpPr>
+          <p:nvPr>
+            <p:ph type="body" idx="1"/>
+          </p:nvPr>
+        </p:nvSpPr>
+        <p:spPr/>
+        <p:txBody>
+          <a:bodyPr/>
+          <a:lstStyle/>
+          <a:p>
+            <a:r>
+              <a:rPr lang="en-US" sz="1200" b="0" i="0" kern="1200" dirty="0">
+                <a:solidFill>
+                  <a:schemeClr val="tx1"/>
+                </a:solidFill>
+                <a:effectLst/>
+                <a:latin typeface="+mn-lt"/>
+                <a:ea typeface="+mn-ea"/>
+                <a:cs typeface="+mn-cs"/>
+              </a:rPr>
+              <a:t>scope depends on the decision, available observations, and the level of confidence needed. Narrower is not automatically better.</a:t>
+            </a:r>
+            <a:endParaRPr lang="en-US" dirty="0"/>
+          </a:p>
+        </p:txBody>
+      </p:sp>
+      <p:sp>
+        <p:nvSpPr>
+          <p:cNvPr id="4" name="Slide Number Placeholder 3"/>
+          <p:cNvSpPr>
+            <a:spLocks noGrp="1"/>
+          </p:cNvSpPr>
+          <p:nvPr>
+            <p:ph type="sldNum" sz="quarter" idx="5"/>
+          </p:nvPr>
+        </p:nvSpPr>
+        <p:spPr/>
+        <p:txBody>
+          <a:bodyPr/>
+          <a:lstStyle/>
+          <a:p>
+            <a:fld id="{117D17FD-8842-8E4F-8C3E-EC8B634B2D5A}" type="slidenum">
+              <a:rPr lang="en-US" smtClean="0"/>
+              <a:t>10</a:t>
+            </a:fld>
+            <a:endParaRPr lang="en-US"/>
+          </a:p>
+        </p:txBody>
+      </p:sp>
+    </p:spTree>
+    <p:extLst>
+      <p:ext uri="{BB962C8B-B14F-4D97-AF65-F5344CB8AC3E}">
+        <p14:creationId xmlns:p14="http://schemas.microsoft.com/office/powerpoint/2010/main" val="20703990"/>
+      </p:ext>
+    </p:extLst>
+  </p:cSld>
+  <p:clrMapOvr>
+    <a:masterClrMapping/>
+  </p:clrMapOvr>
+</p:notes>
+</file>
+
+<file path=ppt/notesSlides/notesSlide11.xml><?xml version="1.0" encoding="utf-8"?>
+<p:notes xmlns:a="http://schemas.openxmlformats.org/drawingml/2006/main" xmlns:r="http://schemas.openxmlformats.org/officeDocument/2006/relationships" xmlns:p="http://schemas.openxmlformats.org/presentationml/2006/main">
+  <p:cSld>
+    <p:spTree>
+      <p:nvGrpSpPr>
+        <p:cNvPr id="1" name=""/>
+        <p:cNvGrpSpPr/>
+        <p:nvPr/>
+      </p:nvGrpSpPr>
+      <p:grpSpPr>
+        <a:xfrm>
+          <a:off x="0" y="0"/>
+          <a:ext cx="0" cy="0"/>
+          <a:chOff x="0" y="0"/>
+          <a:chExt cx="0" cy="0"/>
+        </a:xfrm>
+      </p:grpSpPr>
+      <p:sp>
+        <p:nvSpPr>
+          <p:cNvPr id="2" name="Slide Image Placeholder 1"/>
+          <p:cNvSpPr>
+            <a:spLocks noGrp="1" noRot="1" noChangeAspect="1"/>
+          </p:cNvSpPr>
+          <p:nvPr>
+            <p:ph type="sldImg"/>
+          </p:nvPr>
+        </p:nvSpPr>
+        <p:spPr/>
+      </p:sp>
+      <p:sp>
+        <p:nvSpPr>
+          <p:cNvPr id="3" name="Notes Placeholder 2"/>
+          <p:cNvSpPr>
+            <a:spLocks noGrp="1"/>
+          </p:cNvSpPr>
+          <p:nvPr>
+            <p:ph type="body" idx="1"/>
+          </p:nvPr>
+        </p:nvSpPr>
+        <p:spPr/>
+        <p:txBody>
+          <a:bodyPr/>
+          <a:lstStyle/>
+          <a:p>
+            <a:r>
+              <a:rPr lang="en-US" sz="1200" b="0" i="0" kern="1200" dirty="0">
+                <a:solidFill>
+                  <a:schemeClr val="tx1"/>
+                </a:solidFill>
+                <a:effectLst/>
+                <a:latin typeface="+mn-lt"/>
+                <a:ea typeface="+mn-ea"/>
+                <a:cs typeface="+mn-cs"/>
+              </a:rPr>
+              <a:t>relationship, sequence, or group difference does not by itself establish causation. Keep the discussion conceptual; causal inference will be revisited later.</a:t>
+            </a:r>
+            <a:endParaRPr lang="en-US" dirty="0"/>
+          </a:p>
+        </p:txBody>
+      </p:sp>
+      <p:sp>
+        <p:nvSpPr>
+          <p:cNvPr id="4" name="Slide Number Placeholder 3"/>
+          <p:cNvSpPr>
+            <a:spLocks noGrp="1"/>
+          </p:cNvSpPr>
+          <p:nvPr>
+            <p:ph type="sldNum" sz="quarter" idx="5"/>
+          </p:nvPr>
+        </p:nvSpPr>
+        <p:spPr/>
+        <p:txBody>
+          <a:bodyPr/>
+          <a:lstStyle/>
+          <a:p>
+            <a:fld id="{117D17FD-8842-8E4F-8C3E-EC8B634B2D5A}" type="slidenum">
+              <a:rPr lang="en-US" smtClean="0"/>
+              <a:t>11</a:t>
+            </a:fld>
+            <a:endParaRPr lang="en-US"/>
+          </a:p>
+        </p:txBody>
+      </p:sp>
+    </p:spTree>
+    <p:extLst>
+      <p:ext uri="{BB962C8B-B14F-4D97-AF65-F5344CB8AC3E}">
+        <p14:creationId xmlns:p14="http://schemas.microsoft.com/office/powerpoint/2010/main" val="3645635116"/>
+      </p:ext>
+    </p:extLst>
+  </p:cSld>
+  <p:clrMapOvr>
+    <a:masterClrMapping/>
+  </p:clrMapOvr>
+</p:notes>
+</file>
+
+<file path=ppt/notesSlides/notesSlide12.xml><?xml version="1.0" encoding="utf-8"?>
+<p:notes xmlns:a="http://schemas.openxmlformats.org/drawingml/2006/main" xmlns:r="http://schemas.openxmlformats.org/officeDocument/2006/relationships" xmlns:p="http://schemas.openxmlformats.org/presentationml/2006/main">
+  <p:cSld>
+    <p:spTree>
+      <p:nvGrpSpPr>
+        <p:cNvPr id="1" name=""/>
+        <p:cNvGrpSpPr/>
+        <p:nvPr/>
+      </p:nvGrpSpPr>
+      <p:grpSpPr>
+        <a:xfrm>
+          <a:off x="0" y="0"/>
+          <a:ext cx="0" cy="0"/>
+          <a:chOff x="0" y="0"/>
+          <a:chExt cx="0" cy="0"/>
+        </a:xfrm>
+      </p:grpSpPr>
+      <p:sp>
+        <p:nvSpPr>
+          <p:cNvPr id="2" name="Slide Image Placeholder 1"/>
+          <p:cNvSpPr>
+            <a:spLocks noGrp="1" noRot="1" noChangeAspect="1"/>
+          </p:cNvSpPr>
+          <p:nvPr>
+            <p:ph type="sldImg"/>
+          </p:nvPr>
+        </p:nvSpPr>
+        <p:spPr/>
+      </p:sp>
+      <p:sp>
+        <p:nvSpPr>
+          <p:cNvPr id="3" name="Notes Placeholder 2"/>
+          <p:cNvSpPr>
+            <a:spLocks noGrp="1"/>
+          </p:cNvSpPr>
+          <p:nvPr>
+            <p:ph type="body" idx="1"/>
+          </p:nvPr>
+        </p:nvSpPr>
+        <p:spPr/>
+        <p:txBody>
+          <a:bodyPr/>
+          <a:lstStyle/>
+          <a:p>
+            <a:r>
+              <a:rPr lang="en-US" sz="1200" b="0" i="0" kern="1200" dirty="0">
+                <a:solidFill>
+                  <a:schemeClr val="tx1"/>
+                </a:solidFill>
+                <a:effectLst/>
+                <a:latin typeface="+mn-lt"/>
+                <a:ea typeface="+mn-ea"/>
+                <a:cs typeface="+mn-cs"/>
+              </a:rPr>
+              <a:t>Allow 3 minutes for group work and 2 minutes for discussion. Accept several defensible revisions. Listen for students treating </a:t>
+            </a:r>
+            <a:r>
+              <a:rPr lang="en-US" sz="1200" b="0" i="0" kern="1200" dirty="0" err="1">
+                <a:solidFill>
+                  <a:schemeClr val="tx1"/>
+                </a:solidFill>
+                <a:effectLst/>
+                <a:latin typeface="+mn-lt"/>
+                <a:ea typeface="+mn-ea"/>
+                <a:cs typeface="+mn-cs"/>
+              </a:rPr>
+              <a:t>PlayerLoad</a:t>
+            </a:r>
+            <a:r>
+              <a:rPr lang="en-US" sz="1200" b="0" i="0" kern="1200" dirty="0">
+                <a:solidFill>
+                  <a:schemeClr val="tx1"/>
+                </a:solidFill>
+                <a:effectLst/>
+                <a:latin typeface="+mn-lt"/>
+                <a:ea typeface="+mn-ea"/>
+                <a:cs typeface="+mn-cs"/>
+              </a:rPr>
+              <a:t> as both the construct and the measure, leaving performance undefined, or retaining causal language without a design that could support it.</a:t>
+            </a:r>
+          </a:p>
+          <a:p>
+            <a:br>
+              <a:rPr lang="en-US" dirty="0"/>
+            </a:br>
+            <a:endParaRPr lang="en-US" dirty="0"/>
+          </a:p>
+        </p:txBody>
+      </p:sp>
+      <p:sp>
+        <p:nvSpPr>
+          <p:cNvPr id="4" name="Slide Number Placeholder 3"/>
+          <p:cNvSpPr>
+            <a:spLocks noGrp="1"/>
+          </p:cNvSpPr>
+          <p:nvPr>
+            <p:ph type="sldNum" sz="quarter" idx="5"/>
+          </p:nvPr>
+        </p:nvSpPr>
+        <p:spPr/>
+        <p:txBody>
+          <a:bodyPr/>
+          <a:lstStyle/>
+          <a:p>
+            <a:fld id="{117D17FD-8842-8E4F-8C3E-EC8B634B2D5A}" type="slidenum">
+              <a:rPr lang="en-US" smtClean="0"/>
+              <a:t>12</a:t>
+            </a:fld>
+            <a:endParaRPr lang="en-US"/>
+          </a:p>
+        </p:txBody>
+      </p:sp>
+    </p:spTree>
+    <p:extLst>
+      <p:ext uri="{BB962C8B-B14F-4D97-AF65-F5344CB8AC3E}">
+        <p14:creationId xmlns:p14="http://schemas.microsoft.com/office/powerpoint/2010/main" val="142248071"/>
+      </p:ext>
+    </p:extLst>
+  </p:cSld>
+  <p:clrMapOvr>
+    <a:masterClrMapping/>
+  </p:clrMapOvr>
+</p:notes>
+</file>
+
+<file path=ppt/notesSlides/notesSlide13.xml><?xml version="1.0" encoding="utf-8"?>
+<p:notes xmlns:a="http://schemas.openxmlformats.org/drawingml/2006/main" xmlns:r="http://schemas.openxmlformats.org/officeDocument/2006/relationships" xmlns:p="http://schemas.openxmlformats.org/presentationml/2006/main">
+  <p:cSld>
+    <p:spTree>
+      <p:nvGrpSpPr>
+        <p:cNvPr id="1" name=""/>
+        <p:cNvGrpSpPr/>
+        <p:nvPr/>
+      </p:nvGrpSpPr>
+      <p:grpSpPr>
+        <a:xfrm>
+          <a:off x="0" y="0"/>
+          <a:ext cx="0" cy="0"/>
+          <a:chOff x="0" y="0"/>
+          <a:chExt cx="0" cy="0"/>
+        </a:xfrm>
+      </p:grpSpPr>
+      <p:sp>
+        <p:nvSpPr>
+          <p:cNvPr id="2" name="Slide Image Placeholder 1"/>
+          <p:cNvSpPr>
+            <a:spLocks noGrp="1" noRot="1" noChangeAspect="1"/>
+          </p:cNvSpPr>
+          <p:nvPr>
+            <p:ph type="sldImg"/>
+          </p:nvPr>
+        </p:nvSpPr>
+        <p:spPr/>
+      </p:sp>
+      <p:sp>
+        <p:nvSpPr>
+          <p:cNvPr id="3" name="Notes Placeholder 2"/>
+          <p:cNvSpPr>
+            <a:spLocks noGrp="1"/>
+          </p:cNvSpPr>
+          <p:nvPr>
+            <p:ph type="body" idx="1"/>
+          </p:nvPr>
+        </p:nvSpPr>
+        <p:spPr/>
+        <p:txBody>
+          <a:bodyPr/>
+          <a:lstStyle/>
+          <a:p>
+            <a:r>
+              <a:rPr lang="en-US" sz="1200" b="0" i="0" kern="1200" dirty="0">
+                <a:solidFill>
+                  <a:schemeClr val="tx1"/>
+                </a:solidFill>
+                <a:effectLst/>
+                <a:latin typeface="+mn-lt"/>
+                <a:ea typeface="+mn-ea"/>
+                <a:cs typeface="+mn-cs"/>
+              </a:rPr>
+              <a:t>Briefly tell the streetlight story: someone searches for lost keys under a streetlight because the light is better there, even though the keys were lost elsewhere. Connect the metaphor to convenient sport datasets.</a:t>
+            </a:r>
+          </a:p>
+          <a:p>
+            <a:br>
+              <a:rPr lang="en-US" dirty="0"/>
+            </a:br>
+            <a:endParaRPr lang="en-US" dirty="0"/>
+          </a:p>
+        </p:txBody>
+      </p:sp>
+      <p:sp>
+        <p:nvSpPr>
+          <p:cNvPr id="4" name="Slide Number Placeholder 3"/>
+          <p:cNvSpPr>
+            <a:spLocks noGrp="1"/>
+          </p:cNvSpPr>
+          <p:nvPr>
+            <p:ph type="sldNum" sz="quarter" idx="5"/>
+          </p:nvPr>
+        </p:nvSpPr>
+        <p:spPr/>
+        <p:txBody>
+          <a:bodyPr/>
+          <a:lstStyle/>
+          <a:p>
+            <a:fld id="{117D17FD-8842-8E4F-8C3E-EC8B634B2D5A}" type="slidenum">
+              <a:rPr lang="en-US" smtClean="0"/>
+              <a:t>14</a:t>
+            </a:fld>
+            <a:endParaRPr lang="en-US"/>
+          </a:p>
+        </p:txBody>
+      </p:sp>
+    </p:spTree>
+    <p:extLst>
+      <p:ext uri="{BB962C8B-B14F-4D97-AF65-F5344CB8AC3E}">
+        <p14:creationId xmlns:p14="http://schemas.microsoft.com/office/powerpoint/2010/main" val="2864692811"/>
+      </p:ext>
+    </p:extLst>
+  </p:cSld>
+  <p:clrMapOvr>
+    <a:masterClrMapping/>
+  </p:clrMapOvr>
+</p:notes>
+</file>
+
+<file path=ppt/notesSlides/notesSlide14.xml><?xml version="1.0" encoding="utf-8"?>
+<p:notes xmlns:a="http://schemas.openxmlformats.org/drawingml/2006/main" xmlns:r="http://schemas.openxmlformats.org/officeDocument/2006/relationships" xmlns:p="http://schemas.openxmlformats.org/presentationml/2006/main">
+  <p:cSld>
+    <p:spTree>
+      <p:nvGrpSpPr>
+        <p:cNvPr id="1" name=""/>
+        <p:cNvGrpSpPr/>
+        <p:nvPr/>
+      </p:nvGrpSpPr>
+      <p:grpSpPr>
+        <a:xfrm>
+          <a:off x="0" y="0"/>
+          <a:ext cx="0" cy="0"/>
+          <a:chOff x="0" y="0"/>
+          <a:chExt cx="0" cy="0"/>
+        </a:xfrm>
+      </p:grpSpPr>
+      <p:sp>
+        <p:nvSpPr>
+          <p:cNvPr id="2" name="Slide Image Placeholder 1"/>
+          <p:cNvSpPr>
+            <a:spLocks noGrp="1" noRot="1" noChangeAspect="1"/>
+          </p:cNvSpPr>
+          <p:nvPr>
+            <p:ph type="sldImg"/>
+          </p:nvPr>
+        </p:nvSpPr>
+        <p:spPr/>
+      </p:sp>
+      <p:sp>
+        <p:nvSpPr>
+          <p:cNvPr id="3" name="Notes Placeholder 2"/>
+          <p:cNvSpPr>
+            <a:spLocks noGrp="1"/>
+          </p:cNvSpPr>
+          <p:nvPr>
+            <p:ph type="body" idx="1"/>
+          </p:nvPr>
+        </p:nvSpPr>
+        <p:spPr/>
+        <p:txBody>
+          <a:bodyPr/>
+          <a:lstStyle/>
+          <a:p>
+            <a:r>
+              <a:rPr lang="en-US" sz="1200" b="1" i="0" kern="1200" dirty="0">
+                <a:solidFill>
+                  <a:schemeClr val="tx1"/>
+                </a:solidFill>
+                <a:effectLst/>
+                <a:latin typeface="+mn-lt"/>
+                <a:ea typeface="+mn-ea"/>
+                <a:cs typeface="+mn-cs"/>
+              </a:rPr>
+              <a:t>Ask </a:t>
+            </a:r>
+            <a:r>
+              <a:rPr lang="en-US" sz="1200" b="0" i="0" kern="1200" dirty="0">
+                <a:solidFill>
+                  <a:schemeClr val="tx1"/>
+                </a:solidFill>
+                <a:effectLst/>
+                <a:latin typeface="+mn-lt"/>
+                <a:ea typeface="+mn-ea"/>
+                <a:cs typeface="+mn-cs"/>
+              </a:rPr>
+              <a:t>what information might be more relevant: possession type, shot location, defensive alignment, ball movement, video, or play-by-play sequence. </a:t>
+            </a:r>
+          </a:p>
+          <a:p>
+            <a:endParaRPr lang="en-US" sz="1200" b="0" i="0" kern="1200" dirty="0">
+              <a:solidFill>
+                <a:schemeClr val="tx1"/>
+              </a:solidFill>
+              <a:effectLst/>
+              <a:latin typeface="+mn-lt"/>
+              <a:ea typeface="+mn-ea"/>
+              <a:cs typeface="+mn-cs"/>
+            </a:endParaRPr>
+          </a:p>
+          <a:p>
+            <a:r>
+              <a:rPr lang="en-US" sz="1200" b="0" i="0" kern="1200" dirty="0">
+                <a:solidFill>
+                  <a:schemeClr val="tx1"/>
+                </a:solidFill>
+                <a:effectLst/>
+                <a:latin typeface="+mn-lt"/>
+                <a:ea typeface="+mn-ea"/>
+                <a:cs typeface="+mn-cs"/>
+              </a:rPr>
+              <a:t>The appropriate response may be to collect different data, narrow the claim, or admit the current data cannot answer the question.</a:t>
+            </a:r>
+          </a:p>
+          <a:p>
+            <a:br>
+              <a:rPr lang="en-US" dirty="0"/>
+            </a:br>
+            <a:endParaRPr lang="en-US" dirty="0"/>
+          </a:p>
+        </p:txBody>
+      </p:sp>
+      <p:sp>
+        <p:nvSpPr>
+          <p:cNvPr id="4" name="Slide Number Placeholder 3"/>
+          <p:cNvSpPr>
+            <a:spLocks noGrp="1"/>
+          </p:cNvSpPr>
+          <p:nvPr>
+            <p:ph type="sldNum" sz="quarter" idx="5"/>
+          </p:nvPr>
+        </p:nvSpPr>
+        <p:spPr/>
+        <p:txBody>
+          <a:bodyPr/>
+          <a:lstStyle/>
+          <a:p>
+            <a:fld id="{117D17FD-8842-8E4F-8C3E-EC8B634B2D5A}" type="slidenum">
+              <a:rPr lang="en-US" smtClean="0"/>
+              <a:t>15</a:t>
+            </a:fld>
+            <a:endParaRPr lang="en-US"/>
+          </a:p>
+        </p:txBody>
+      </p:sp>
+    </p:spTree>
+    <p:extLst>
+      <p:ext uri="{BB962C8B-B14F-4D97-AF65-F5344CB8AC3E}">
+        <p14:creationId xmlns:p14="http://schemas.microsoft.com/office/powerpoint/2010/main" val="1485131233"/>
+      </p:ext>
+    </p:extLst>
+  </p:cSld>
+  <p:clrMapOvr>
+    <a:masterClrMapping/>
+  </p:clrMapOvr>
+</p:notes>
+</file>
+
+<file path=ppt/notesSlides/notesSlide15.xml><?xml version="1.0" encoding="utf-8"?>
+<p:notes xmlns:a="http://schemas.openxmlformats.org/drawingml/2006/main" xmlns:r="http://schemas.openxmlformats.org/officeDocument/2006/relationships" xmlns:p="http://schemas.openxmlformats.org/presentationml/2006/main">
+  <p:cSld>
+    <p:spTree>
+      <p:nvGrpSpPr>
+        <p:cNvPr id="1" name=""/>
+        <p:cNvGrpSpPr/>
+        <p:nvPr/>
+      </p:nvGrpSpPr>
+      <p:grpSpPr>
+        <a:xfrm>
+          <a:off x="0" y="0"/>
+          <a:ext cx="0" cy="0"/>
+          <a:chOff x="0" y="0"/>
+          <a:chExt cx="0" cy="0"/>
+        </a:xfrm>
+      </p:grpSpPr>
+      <p:sp>
+        <p:nvSpPr>
+          <p:cNvPr id="2" name="Slide Image Placeholder 1"/>
+          <p:cNvSpPr>
+            <a:spLocks noGrp="1" noRot="1" noChangeAspect="1"/>
+          </p:cNvSpPr>
+          <p:nvPr>
+            <p:ph type="sldImg"/>
+          </p:nvPr>
+        </p:nvSpPr>
+        <p:spPr/>
+      </p:sp>
+      <p:sp>
+        <p:nvSpPr>
+          <p:cNvPr id="3" name="Notes Placeholder 2"/>
+          <p:cNvSpPr>
+            <a:spLocks noGrp="1"/>
+          </p:cNvSpPr>
+          <p:nvPr>
+            <p:ph type="body" idx="1"/>
+          </p:nvPr>
+        </p:nvSpPr>
+        <p:spPr/>
+        <p:txBody>
+          <a:bodyPr/>
+          <a:lstStyle/>
+          <a:p>
+            <a:pPr fontAlgn="ctr"/>
+            <a:r>
+              <a:rPr lang="en-US" sz="1200" b="0" i="0" kern="1200" dirty="0">
+                <a:solidFill>
+                  <a:schemeClr val="tx1"/>
+                </a:solidFill>
+                <a:effectLst/>
+                <a:latin typeface="+mn-lt"/>
+                <a:ea typeface="+mn-ea"/>
+                <a:cs typeface="+mn-cs"/>
+              </a:rPr>
+              <a:t> analysts cannot ignore feasibility. The problem is when when convenience becomes the rationale for the analysis.</a:t>
+            </a:r>
+            <a:endParaRPr lang="en-US" dirty="0"/>
+          </a:p>
+        </p:txBody>
+      </p:sp>
+      <p:sp>
+        <p:nvSpPr>
+          <p:cNvPr id="4" name="Slide Number Placeholder 3"/>
+          <p:cNvSpPr>
+            <a:spLocks noGrp="1"/>
+          </p:cNvSpPr>
+          <p:nvPr>
+            <p:ph type="sldNum" sz="quarter" idx="5"/>
+          </p:nvPr>
+        </p:nvSpPr>
+        <p:spPr/>
+        <p:txBody>
+          <a:bodyPr/>
+          <a:lstStyle/>
+          <a:p>
+            <a:fld id="{117D17FD-8842-8E4F-8C3E-EC8B634B2D5A}" type="slidenum">
+              <a:rPr lang="en-US" smtClean="0"/>
+              <a:t>16</a:t>
+            </a:fld>
+            <a:endParaRPr lang="en-US"/>
+          </a:p>
+        </p:txBody>
+      </p:sp>
+    </p:spTree>
+    <p:extLst>
+      <p:ext uri="{BB962C8B-B14F-4D97-AF65-F5344CB8AC3E}">
+        <p14:creationId xmlns:p14="http://schemas.microsoft.com/office/powerpoint/2010/main" val="2415367151"/>
+      </p:ext>
+    </p:extLst>
+  </p:cSld>
+  <p:clrMapOvr>
+    <a:masterClrMapping/>
+  </p:clrMapOvr>
+</p:notes>
+</file>
+
+<file path=ppt/notesSlides/notesSlide2.xml><?xml version="1.0" encoding="utf-8"?>
+<p:notes xmlns:a="http://schemas.openxmlformats.org/drawingml/2006/main" xmlns:r="http://schemas.openxmlformats.org/officeDocument/2006/relationships" xmlns:p="http://schemas.openxmlformats.org/presentationml/2006/main">
+  <p:cSld>
+    <p:spTree>
+      <p:nvGrpSpPr>
+        <p:cNvPr id="1" name=""/>
+        <p:cNvGrpSpPr/>
+        <p:nvPr/>
+      </p:nvGrpSpPr>
+      <p:grpSpPr>
+        <a:xfrm>
+          <a:off x="0" y="0"/>
+          <a:ext cx="0" cy="0"/>
+          <a:chOff x="0" y="0"/>
+          <a:chExt cx="0" cy="0"/>
+        </a:xfrm>
+      </p:grpSpPr>
+      <p:sp>
+        <p:nvSpPr>
+          <p:cNvPr id="2" name="Slide Image Placeholder 1"/>
+          <p:cNvSpPr>
+            <a:spLocks noGrp="1" noRot="1" noChangeAspect="1"/>
+          </p:cNvSpPr>
+          <p:nvPr>
+            <p:ph type="sldImg"/>
+          </p:nvPr>
+        </p:nvSpPr>
+        <p:spPr/>
+      </p:sp>
+      <p:sp>
+        <p:nvSpPr>
+          <p:cNvPr id="3" name="Notes Placeholder 2"/>
+          <p:cNvSpPr>
+            <a:spLocks noGrp="1"/>
+          </p:cNvSpPr>
+          <p:nvPr>
+            <p:ph type="body" idx="1"/>
+          </p:nvPr>
+        </p:nvSpPr>
+        <p:spPr/>
+        <p:txBody>
+          <a:bodyPr/>
+          <a:lstStyle/>
+          <a:p>
+            <a:r>
+              <a:rPr lang="en-US" sz="1200" b="0" i="0" kern="1200" dirty="0">
+                <a:solidFill>
+                  <a:schemeClr val="tx1"/>
+                </a:solidFill>
+                <a:effectLst/>
+                <a:latin typeface="+mn-lt"/>
+                <a:ea typeface="+mn-ea"/>
+                <a:cs typeface="+mn-cs"/>
+              </a:rPr>
+              <a:t>Give students 90 seconds to write independently, then ask them to share with a partner. Collect two or three examples for use later in the lecture. The purpose is to begin with their sports thinking rather than analytical terminology.</a:t>
+            </a:r>
+          </a:p>
+          <a:p>
+            <a:br>
+              <a:rPr lang="en-US" dirty="0"/>
+            </a:br>
+            <a:endParaRPr lang="en-US" dirty="0"/>
+          </a:p>
+        </p:txBody>
+      </p:sp>
+      <p:sp>
+        <p:nvSpPr>
+          <p:cNvPr id="4" name="Slide Number Placeholder 3"/>
+          <p:cNvSpPr>
+            <a:spLocks noGrp="1"/>
+          </p:cNvSpPr>
+          <p:nvPr>
+            <p:ph type="sldNum" sz="quarter" idx="5"/>
+          </p:nvPr>
+        </p:nvSpPr>
+        <p:spPr/>
+        <p:txBody>
+          <a:bodyPr/>
+          <a:lstStyle/>
+          <a:p>
+            <a:fld id="{117D17FD-8842-8E4F-8C3E-EC8B634B2D5A}" type="slidenum">
+              <a:rPr lang="en-US" smtClean="0"/>
+              <a:t>2</a:t>
+            </a:fld>
+            <a:endParaRPr lang="en-US"/>
+          </a:p>
+        </p:txBody>
+      </p:sp>
+    </p:spTree>
+    <p:extLst>
+      <p:ext uri="{BB962C8B-B14F-4D97-AF65-F5344CB8AC3E}">
+        <p14:creationId xmlns:p14="http://schemas.microsoft.com/office/powerpoint/2010/main" val="405138125"/>
+      </p:ext>
+    </p:extLst>
+  </p:cSld>
+  <p:clrMapOvr>
+    <a:masterClrMapping/>
+  </p:clrMapOvr>
+</p:notes>
+</file>
+
+<file path=ppt/notesSlides/notesSlide3.xml><?xml version="1.0" encoding="utf-8"?>
+<p:notes xmlns:a="http://schemas.openxmlformats.org/drawingml/2006/main" xmlns:r="http://schemas.openxmlformats.org/officeDocument/2006/relationships" xmlns:p="http://schemas.openxmlformats.org/presentationml/2006/main">
+  <p:cSld>
+    <p:spTree>
+      <p:nvGrpSpPr>
+        <p:cNvPr id="1" name=""/>
+        <p:cNvGrpSpPr/>
+        <p:nvPr/>
+      </p:nvGrpSpPr>
+      <p:grpSpPr>
+        <a:xfrm>
+          <a:off x="0" y="0"/>
+          <a:ext cx="0" cy="0"/>
+          <a:chOff x="0" y="0"/>
+          <a:chExt cx="0" cy="0"/>
+        </a:xfrm>
+      </p:grpSpPr>
+      <p:sp>
+        <p:nvSpPr>
+          <p:cNvPr id="2" name="Slide Image Placeholder 1"/>
+          <p:cNvSpPr>
+            <a:spLocks noGrp="1" noRot="1" noChangeAspect="1"/>
+          </p:cNvSpPr>
+          <p:nvPr>
+            <p:ph type="sldImg"/>
+          </p:nvPr>
+        </p:nvSpPr>
+        <p:spPr/>
+      </p:sp>
+      <p:sp>
+        <p:nvSpPr>
+          <p:cNvPr id="3" name="Notes Placeholder 2"/>
+          <p:cNvSpPr>
+            <a:spLocks noGrp="1"/>
+          </p:cNvSpPr>
+          <p:nvPr>
+            <p:ph type="body" idx="1"/>
+          </p:nvPr>
+        </p:nvSpPr>
+        <p:spPr/>
+        <p:txBody>
+          <a:bodyPr/>
+          <a:lstStyle/>
+          <a:p>
+            <a:r>
+              <a:rPr lang="en-US" sz="1200" b="0" i="0" kern="1200" dirty="0">
+                <a:solidFill>
+                  <a:schemeClr val="tx1"/>
+                </a:solidFill>
+                <a:effectLst/>
+                <a:latin typeface="+mn-lt"/>
+                <a:ea typeface="+mn-ea"/>
+                <a:cs typeface="+mn-cs"/>
+              </a:rPr>
+              <a:t>Do not frame the original statement as bad. It is useful practitioner knowledge, but it is not yet precise enough to guide data collection or analysis.</a:t>
+            </a:r>
+          </a:p>
+          <a:p>
+            <a:br>
+              <a:rPr lang="en-US" dirty="0"/>
+            </a:br>
+            <a:endParaRPr lang="en-US" dirty="0"/>
+          </a:p>
+        </p:txBody>
+      </p:sp>
+      <p:sp>
+        <p:nvSpPr>
+          <p:cNvPr id="4" name="Slide Number Placeholder 3"/>
+          <p:cNvSpPr>
+            <a:spLocks noGrp="1"/>
+          </p:cNvSpPr>
+          <p:nvPr>
+            <p:ph type="sldNum" sz="quarter" idx="5"/>
+          </p:nvPr>
+        </p:nvSpPr>
+        <p:spPr/>
+        <p:txBody>
+          <a:bodyPr/>
+          <a:lstStyle/>
+          <a:p>
+            <a:fld id="{117D17FD-8842-8E4F-8C3E-EC8B634B2D5A}" type="slidenum">
+              <a:rPr lang="en-US" smtClean="0"/>
+              <a:t>3</a:t>
+            </a:fld>
+            <a:endParaRPr lang="en-US"/>
+          </a:p>
+        </p:txBody>
+      </p:sp>
+    </p:spTree>
+    <p:extLst>
+      <p:ext uri="{BB962C8B-B14F-4D97-AF65-F5344CB8AC3E}">
+        <p14:creationId xmlns:p14="http://schemas.microsoft.com/office/powerpoint/2010/main" val="2536853171"/>
+      </p:ext>
+    </p:extLst>
+  </p:cSld>
+  <p:clrMapOvr>
+    <a:masterClrMapping/>
+  </p:clrMapOvr>
+</p:notes>
+</file>
+
+<file path=ppt/notesSlides/notesSlide4.xml><?xml version="1.0" encoding="utf-8"?>
+<p:notes xmlns:a="http://schemas.openxmlformats.org/drawingml/2006/main" xmlns:r="http://schemas.openxmlformats.org/officeDocument/2006/relationships" xmlns:p="http://schemas.openxmlformats.org/presentationml/2006/main">
+  <p:cSld>
+    <p:spTree>
+      <p:nvGrpSpPr>
+        <p:cNvPr id="1" name=""/>
+        <p:cNvGrpSpPr/>
+        <p:nvPr/>
+      </p:nvGrpSpPr>
+      <p:grpSpPr>
+        <a:xfrm>
+          <a:off x="0" y="0"/>
+          <a:ext cx="0" cy="0"/>
+          <a:chOff x="0" y="0"/>
+          <a:chExt cx="0" cy="0"/>
+        </a:xfrm>
+      </p:grpSpPr>
+      <p:sp>
+        <p:nvSpPr>
+          <p:cNvPr id="2" name="Slide Image Placeholder 1"/>
+          <p:cNvSpPr>
+            <a:spLocks noGrp="1" noRot="1" noChangeAspect="1"/>
+          </p:cNvSpPr>
+          <p:nvPr>
+            <p:ph type="sldImg"/>
+          </p:nvPr>
+        </p:nvSpPr>
+        <p:spPr/>
+      </p:sp>
+      <p:sp>
+        <p:nvSpPr>
+          <p:cNvPr id="3" name="Notes Placeholder 2"/>
+          <p:cNvSpPr>
+            <a:spLocks noGrp="1"/>
+          </p:cNvSpPr>
+          <p:nvPr>
+            <p:ph type="body" idx="1"/>
+          </p:nvPr>
+        </p:nvSpPr>
+        <p:spPr/>
+        <p:txBody>
+          <a:bodyPr/>
+          <a:lstStyle/>
+          <a:p>
+            <a:r>
+              <a:rPr lang="en-US" sz="1200" b="0" i="0" kern="1200" dirty="0">
+                <a:solidFill>
+                  <a:schemeClr val="tx1"/>
+                </a:solidFill>
+                <a:effectLst/>
+                <a:latin typeface="+mn-lt"/>
+                <a:ea typeface="+mn-ea"/>
+                <a:cs typeface="+mn-cs"/>
+              </a:rPr>
+              <a:t>Briefly connect this to the prior class: the domain tells us where the problem lives, and the analytical purpose tells us what kind of answer is needed. Today focuses on making the question answerable.</a:t>
+            </a:r>
+          </a:p>
+          <a:p>
+            <a:br>
+              <a:rPr lang="en-US" dirty="0"/>
+            </a:br>
+            <a:endParaRPr lang="en-US" dirty="0"/>
+          </a:p>
+        </p:txBody>
+      </p:sp>
+      <p:sp>
+        <p:nvSpPr>
+          <p:cNvPr id="4" name="Slide Number Placeholder 3"/>
+          <p:cNvSpPr>
+            <a:spLocks noGrp="1"/>
+          </p:cNvSpPr>
+          <p:nvPr>
+            <p:ph type="sldNum" sz="quarter" idx="5"/>
+          </p:nvPr>
+        </p:nvSpPr>
+        <p:spPr/>
+        <p:txBody>
+          <a:bodyPr/>
+          <a:lstStyle/>
+          <a:p>
+            <a:fld id="{117D17FD-8842-8E4F-8C3E-EC8B634B2D5A}" type="slidenum">
+              <a:rPr lang="en-US" smtClean="0"/>
+              <a:t>4</a:t>
+            </a:fld>
+            <a:endParaRPr lang="en-US"/>
+          </a:p>
+        </p:txBody>
+      </p:sp>
+    </p:spTree>
+    <p:extLst>
+      <p:ext uri="{BB962C8B-B14F-4D97-AF65-F5344CB8AC3E}">
+        <p14:creationId xmlns:p14="http://schemas.microsoft.com/office/powerpoint/2010/main" val="3608129823"/>
+      </p:ext>
+    </p:extLst>
+  </p:cSld>
+  <p:clrMapOvr>
+    <a:masterClrMapping/>
+  </p:clrMapOvr>
+</p:notes>
+</file>
+
+<file path=ppt/notesSlides/notesSlide5.xml><?xml version="1.0" encoding="utf-8"?>
+<p:notes xmlns:a="http://schemas.openxmlformats.org/drawingml/2006/main" xmlns:r="http://schemas.openxmlformats.org/officeDocument/2006/relationships" xmlns:p="http://schemas.openxmlformats.org/presentationml/2006/main">
+  <p:cSld>
+    <p:spTree>
+      <p:nvGrpSpPr>
+        <p:cNvPr id="1" name=""/>
+        <p:cNvGrpSpPr/>
+        <p:nvPr/>
+      </p:nvGrpSpPr>
+      <p:grpSpPr>
+        <a:xfrm>
+          <a:off x="0" y="0"/>
+          <a:ext cx="0" cy="0"/>
+          <a:chOff x="0" y="0"/>
+          <a:chExt cx="0" cy="0"/>
+        </a:xfrm>
+      </p:grpSpPr>
+      <p:sp>
+        <p:nvSpPr>
+          <p:cNvPr id="2" name="Slide Image Placeholder 1"/>
+          <p:cNvSpPr>
+            <a:spLocks noGrp="1" noRot="1" noChangeAspect="1"/>
+          </p:cNvSpPr>
+          <p:nvPr>
+            <p:ph type="sldImg"/>
+          </p:nvPr>
+        </p:nvSpPr>
+        <p:spPr/>
+      </p:sp>
+      <p:sp>
+        <p:nvSpPr>
+          <p:cNvPr id="3" name="Notes Placeholder 2"/>
+          <p:cNvSpPr>
+            <a:spLocks noGrp="1"/>
+          </p:cNvSpPr>
+          <p:nvPr>
+            <p:ph type="body" idx="1"/>
+          </p:nvPr>
+        </p:nvSpPr>
+        <p:spPr/>
+        <p:txBody>
+          <a:bodyPr/>
+          <a:lstStyle/>
+          <a:p>
+            <a:r>
+              <a:rPr lang="en-US" sz="1200" b="0" i="0" kern="1200" dirty="0">
+                <a:solidFill>
+                  <a:schemeClr val="tx1"/>
+                </a:solidFill>
+                <a:effectLst/>
+                <a:latin typeface="+mn-lt"/>
+                <a:ea typeface="+mn-ea"/>
+                <a:cs typeface="+mn-cs"/>
+              </a:rPr>
+              <a:t>Ask students what information would matter for each decision. Highlight how timeframe, comparison, and acceptable uncertainty change with the decision.</a:t>
+            </a:r>
+          </a:p>
+          <a:p>
+            <a:br>
+              <a:rPr lang="en-US" dirty="0"/>
+            </a:br>
+            <a:endParaRPr lang="en-US" dirty="0"/>
+          </a:p>
+        </p:txBody>
+      </p:sp>
+      <p:sp>
+        <p:nvSpPr>
+          <p:cNvPr id="4" name="Slide Number Placeholder 3"/>
+          <p:cNvSpPr>
+            <a:spLocks noGrp="1"/>
+          </p:cNvSpPr>
+          <p:nvPr>
+            <p:ph type="sldNum" sz="quarter" idx="5"/>
+          </p:nvPr>
+        </p:nvSpPr>
+        <p:spPr/>
+        <p:txBody>
+          <a:bodyPr/>
+          <a:lstStyle/>
+          <a:p>
+            <a:fld id="{117D17FD-8842-8E4F-8C3E-EC8B634B2D5A}" type="slidenum">
+              <a:rPr lang="en-US" smtClean="0"/>
+              <a:t>5</a:t>
+            </a:fld>
+            <a:endParaRPr lang="en-US"/>
+          </a:p>
+        </p:txBody>
+      </p:sp>
+    </p:spTree>
+    <p:extLst>
+      <p:ext uri="{BB962C8B-B14F-4D97-AF65-F5344CB8AC3E}">
+        <p14:creationId xmlns:p14="http://schemas.microsoft.com/office/powerpoint/2010/main" val="22851240"/>
+      </p:ext>
+    </p:extLst>
+  </p:cSld>
+  <p:clrMapOvr>
+    <a:masterClrMapping/>
+  </p:clrMapOvr>
+</p:notes>
+</file>
+
+<file path=ppt/notesSlides/notesSlide6.xml><?xml version="1.0" encoding="utf-8"?>
+<p:notes xmlns:a="http://schemas.openxmlformats.org/drawingml/2006/main" xmlns:r="http://schemas.openxmlformats.org/officeDocument/2006/relationships" xmlns:p="http://schemas.openxmlformats.org/presentationml/2006/main">
+  <p:cSld>
+    <p:spTree>
+      <p:nvGrpSpPr>
+        <p:cNvPr id="1" name=""/>
+        <p:cNvGrpSpPr/>
+        <p:nvPr/>
+      </p:nvGrpSpPr>
+      <p:grpSpPr>
+        <a:xfrm>
+          <a:off x="0" y="0"/>
+          <a:ext cx="0" cy="0"/>
+          <a:chOff x="0" y="0"/>
+          <a:chExt cx="0" cy="0"/>
+        </a:xfrm>
+      </p:grpSpPr>
+      <p:sp>
+        <p:nvSpPr>
+          <p:cNvPr id="2" name="Slide Image Placeholder 1"/>
+          <p:cNvSpPr>
+            <a:spLocks noGrp="1" noRot="1" noChangeAspect="1"/>
+          </p:cNvSpPr>
+          <p:nvPr>
+            <p:ph type="sldImg"/>
+          </p:nvPr>
+        </p:nvSpPr>
+        <p:spPr/>
+      </p:sp>
+      <p:sp>
+        <p:nvSpPr>
+          <p:cNvPr id="3" name="Notes Placeholder 2"/>
+          <p:cNvSpPr>
+            <a:spLocks noGrp="1"/>
+          </p:cNvSpPr>
+          <p:nvPr>
+            <p:ph type="body" idx="1"/>
+          </p:nvPr>
+        </p:nvSpPr>
+        <p:spPr/>
+        <p:txBody>
+          <a:bodyPr/>
+          <a:lstStyle/>
+          <a:p>
+            <a:r>
+              <a:rPr lang="en-US" sz="1200" b="0" i="0" kern="1200" dirty="0">
+                <a:solidFill>
+                  <a:schemeClr val="tx1"/>
+                </a:solidFill>
+                <a:effectLst/>
+                <a:latin typeface="+mn-lt"/>
+                <a:ea typeface="+mn-ea"/>
+                <a:cs typeface="+mn-cs"/>
+              </a:rPr>
+              <a:t>Use this to introduce operationalization without relying heavily on the term. A countermovement-jump metric, wellness score, or heart-rate response may provide evidence about fatigue, but none is a universal fatigue detector.</a:t>
+            </a:r>
+          </a:p>
+          <a:p>
+            <a:br>
+              <a:rPr lang="en-US" dirty="0"/>
+            </a:br>
+            <a:endParaRPr lang="en-US" b="1" dirty="0"/>
+          </a:p>
+        </p:txBody>
+      </p:sp>
+      <p:sp>
+        <p:nvSpPr>
+          <p:cNvPr id="4" name="Slide Number Placeholder 3"/>
+          <p:cNvSpPr>
+            <a:spLocks noGrp="1"/>
+          </p:cNvSpPr>
+          <p:nvPr>
+            <p:ph type="sldNum" sz="quarter" idx="5"/>
+          </p:nvPr>
+        </p:nvSpPr>
+        <p:spPr/>
+        <p:txBody>
+          <a:bodyPr/>
+          <a:lstStyle/>
+          <a:p>
+            <a:fld id="{117D17FD-8842-8E4F-8C3E-EC8B634B2D5A}" type="slidenum">
+              <a:rPr lang="en-US" smtClean="0"/>
+              <a:t>6</a:t>
+            </a:fld>
+            <a:endParaRPr lang="en-US"/>
+          </a:p>
+        </p:txBody>
+      </p:sp>
+    </p:spTree>
+    <p:extLst>
+      <p:ext uri="{BB962C8B-B14F-4D97-AF65-F5344CB8AC3E}">
+        <p14:creationId xmlns:p14="http://schemas.microsoft.com/office/powerpoint/2010/main" val="686014722"/>
+      </p:ext>
+    </p:extLst>
+  </p:cSld>
+  <p:clrMapOvr>
+    <a:masterClrMapping/>
+  </p:clrMapOvr>
+</p:notes>
+</file>
+
+<file path=ppt/notesSlides/notesSlide7.xml><?xml version="1.0" encoding="utf-8"?>
+<p:notes xmlns:a="http://schemas.openxmlformats.org/drawingml/2006/main" xmlns:r="http://schemas.openxmlformats.org/officeDocument/2006/relationships" xmlns:p="http://schemas.openxmlformats.org/presentationml/2006/main">
+  <p:cSld>
+    <p:spTree>
+      <p:nvGrpSpPr>
+        <p:cNvPr id="1" name=""/>
+        <p:cNvGrpSpPr/>
+        <p:nvPr/>
+      </p:nvGrpSpPr>
+      <p:grpSpPr>
+        <a:xfrm>
+          <a:off x="0" y="0"/>
+          <a:ext cx="0" cy="0"/>
+          <a:chOff x="0" y="0"/>
+          <a:chExt cx="0" cy="0"/>
+        </a:xfrm>
+      </p:grpSpPr>
+      <p:sp>
+        <p:nvSpPr>
+          <p:cNvPr id="2" name="Slide Image Placeholder 1"/>
+          <p:cNvSpPr>
+            <a:spLocks noGrp="1" noRot="1" noChangeAspect="1"/>
+          </p:cNvSpPr>
+          <p:nvPr>
+            <p:ph type="sldImg"/>
+          </p:nvPr>
+        </p:nvSpPr>
+        <p:spPr/>
+      </p:sp>
+      <p:sp>
+        <p:nvSpPr>
+          <p:cNvPr id="3" name="Notes Placeholder 2"/>
+          <p:cNvSpPr>
+            <a:spLocks noGrp="1"/>
+          </p:cNvSpPr>
+          <p:nvPr>
+            <p:ph type="body" idx="1"/>
+          </p:nvPr>
+        </p:nvSpPr>
+        <p:spPr/>
+        <p:txBody>
+          <a:bodyPr/>
+          <a:lstStyle/>
+          <a:p>
+            <a:r>
+              <a:rPr lang="en-US" sz="1200" b="0" i="0" kern="1200" dirty="0">
+                <a:solidFill>
+                  <a:schemeClr val="tx1"/>
+                </a:solidFill>
+                <a:effectLst/>
+                <a:latin typeface="+mn-lt"/>
+                <a:ea typeface="+mn-ea"/>
+                <a:cs typeface="+mn-cs"/>
+              </a:rPr>
+              <a:t>Ask which comparison would be most appropriate if the decision is whether to modify tomorrow's training. There may be more than one defensible answer; require students to connect their choice to the decision.</a:t>
+            </a:r>
+          </a:p>
+          <a:p>
+            <a:br>
+              <a:rPr lang="en-US" dirty="0"/>
+            </a:br>
+            <a:endParaRPr lang="en-US" b="1" dirty="0"/>
+          </a:p>
+        </p:txBody>
+      </p:sp>
+      <p:sp>
+        <p:nvSpPr>
+          <p:cNvPr id="4" name="Slide Number Placeholder 3"/>
+          <p:cNvSpPr>
+            <a:spLocks noGrp="1"/>
+          </p:cNvSpPr>
+          <p:nvPr>
+            <p:ph type="sldNum" sz="quarter" idx="5"/>
+          </p:nvPr>
+        </p:nvSpPr>
+        <p:spPr/>
+        <p:txBody>
+          <a:bodyPr/>
+          <a:lstStyle/>
+          <a:p>
+            <a:fld id="{117D17FD-8842-8E4F-8C3E-EC8B634B2D5A}" type="slidenum">
+              <a:rPr lang="en-US" smtClean="0"/>
+              <a:t>7</a:t>
+            </a:fld>
+            <a:endParaRPr lang="en-US"/>
+          </a:p>
+        </p:txBody>
+      </p:sp>
+    </p:spTree>
+    <p:extLst>
+      <p:ext uri="{BB962C8B-B14F-4D97-AF65-F5344CB8AC3E}">
+        <p14:creationId xmlns:p14="http://schemas.microsoft.com/office/powerpoint/2010/main" val="1843091341"/>
+      </p:ext>
+    </p:extLst>
+  </p:cSld>
+  <p:clrMapOvr>
+    <a:masterClrMapping/>
+  </p:clrMapOvr>
+</p:notes>
+</file>
+
+<file path=ppt/notesSlides/notesSlide8.xml><?xml version="1.0" encoding="utf-8"?>
+<p:notes xmlns:a="http://schemas.openxmlformats.org/drawingml/2006/main" xmlns:r="http://schemas.openxmlformats.org/officeDocument/2006/relationships" xmlns:p="http://schemas.openxmlformats.org/presentationml/2006/main">
+  <p:cSld>
+    <p:spTree>
+      <p:nvGrpSpPr>
+        <p:cNvPr id="1" name=""/>
+        <p:cNvGrpSpPr/>
+        <p:nvPr/>
+      </p:nvGrpSpPr>
+      <p:grpSpPr>
+        <a:xfrm>
+          <a:off x="0" y="0"/>
+          <a:ext cx="0" cy="0"/>
+          <a:chOff x="0" y="0"/>
+          <a:chExt cx="0" cy="0"/>
+        </a:xfrm>
+      </p:grpSpPr>
+      <p:sp>
+        <p:nvSpPr>
+          <p:cNvPr id="2" name="Slide Image Placeholder 1"/>
+          <p:cNvSpPr>
+            <a:spLocks noGrp="1" noRot="1" noChangeAspect="1"/>
+          </p:cNvSpPr>
+          <p:nvPr>
+            <p:ph type="sldImg"/>
+          </p:nvPr>
+        </p:nvSpPr>
+        <p:spPr/>
+      </p:sp>
+      <p:sp>
+        <p:nvSpPr>
+          <p:cNvPr id="3" name="Notes Placeholder 2"/>
+          <p:cNvSpPr>
+            <a:spLocks noGrp="1"/>
+          </p:cNvSpPr>
+          <p:nvPr>
+            <p:ph type="body" idx="1"/>
+          </p:nvPr>
+        </p:nvSpPr>
+        <p:spPr/>
+        <p:txBody>
+          <a:bodyPr/>
+          <a:lstStyle/>
+          <a:p>
+            <a:r>
+              <a:rPr lang="en-US" sz="1200" b="0" i="0" kern="1200" dirty="0">
+                <a:solidFill>
+                  <a:schemeClr val="tx1"/>
+                </a:solidFill>
+                <a:effectLst/>
+                <a:latin typeface="+mn-lt"/>
+                <a:ea typeface="+mn-ea"/>
+                <a:cs typeface="+mn-cs"/>
+              </a:rPr>
+              <a:t>Avoid turning this into a demand to include every possible variable. The goal is to identify context that is material to the question.</a:t>
+            </a:r>
+          </a:p>
+          <a:p>
+            <a:br>
+              <a:rPr lang="en-US" dirty="0"/>
+            </a:br>
+            <a:endParaRPr lang="en-US" b="1" dirty="0"/>
+          </a:p>
+        </p:txBody>
+      </p:sp>
+      <p:sp>
+        <p:nvSpPr>
+          <p:cNvPr id="4" name="Slide Number Placeholder 3"/>
+          <p:cNvSpPr>
+            <a:spLocks noGrp="1"/>
+          </p:cNvSpPr>
+          <p:nvPr>
+            <p:ph type="sldNum" sz="quarter" idx="5"/>
+          </p:nvPr>
+        </p:nvSpPr>
+        <p:spPr/>
+        <p:txBody>
+          <a:bodyPr/>
+          <a:lstStyle/>
+          <a:p>
+            <a:fld id="{117D17FD-8842-8E4F-8C3E-EC8B634B2D5A}" type="slidenum">
+              <a:rPr lang="en-US" smtClean="0"/>
+              <a:t>8</a:t>
+            </a:fld>
+            <a:endParaRPr lang="en-US"/>
+          </a:p>
+        </p:txBody>
+      </p:sp>
+    </p:spTree>
+    <p:extLst>
+      <p:ext uri="{BB962C8B-B14F-4D97-AF65-F5344CB8AC3E}">
+        <p14:creationId xmlns:p14="http://schemas.microsoft.com/office/powerpoint/2010/main" val="1669870936"/>
+      </p:ext>
+    </p:extLst>
+  </p:cSld>
+  <p:clrMapOvr>
+    <a:masterClrMapping/>
+  </p:clrMapOvr>
+</p:notes>
+</file>
+
+<file path=ppt/notesSlides/notesSlide9.xml><?xml version="1.0" encoding="utf-8"?>
+<p:notes xmlns:a="http://schemas.openxmlformats.org/drawingml/2006/main" xmlns:r="http://schemas.openxmlformats.org/officeDocument/2006/relationships" xmlns:p="http://schemas.openxmlformats.org/presentationml/2006/main">
+  <p:cSld>
+    <p:spTree>
+      <p:nvGrpSpPr>
+        <p:cNvPr id="1" name=""/>
+        <p:cNvGrpSpPr/>
+        <p:nvPr/>
+      </p:nvGrpSpPr>
+      <p:grpSpPr>
+        <a:xfrm>
+          <a:off x="0" y="0"/>
+          <a:ext cx="0" cy="0"/>
+          <a:chOff x="0" y="0"/>
+          <a:chExt cx="0" cy="0"/>
+        </a:xfrm>
+      </p:grpSpPr>
+      <p:sp>
+        <p:nvSpPr>
+          <p:cNvPr id="2" name="Slide Image Placeholder 1"/>
+          <p:cNvSpPr>
+            <a:spLocks noGrp="1" noRot="1" noChangeAspect="1"/>
+          </p:cNvSpPr>
+          <p:nvPr>
+            <p:ph type="sldImg"/>
+          </p:nvPr>
+        </p:nvSpPr>
+        <p:spPr/>
+      </p:sp>
+      <p:sp>
+        <p:nvSpPr>
+          <p:cNvPr id="3" name="Notes Placeholder 2"/>
+          <p:cNvSpPr>
+            <a:spLocks noGrp="1"/>
+          </p:cNvSpPr>
+          <p:nvPr>
+            <p:ph type="body" idx="1"/>
+          </p:nvPr>
+        </p:nvSpPr>
+        <p:spPr/>
+        <p:txBody>
+          <a:bodyPr/>
+          <a:lstStyle/>
+          <a:p>
+            <a:r>
+              <a:rPr lang="en-US" sz="1200" b="0" i="0" kern="1200" dirty="0">
+                <a:solidFill>
+                  <a:schemeClr val="tx1"/>
+                </a:solidFill>
+                <a:effectLst/>
+                <a:latin typeface="+mn-lt"/>
+                <a:ea typeface="+mn-ea"/>
+                <a:cs typeface="+mn-cs"/>
+              </a:rPr>
+              <a:t>Ask what remains unresolved. Possible answers include the definition of scoring efficiency, the definition of a close game, whether overtime is included, and what decision the analysis would inform. Emphasize that questions can be refined iteratively.</a:t>
+            </a:r>
+          </a:p>
+          <a:p>
+            <a:br>
+              <a:rPr lang="en-US" dirty="0"/>
+            </a:br>
+            <a:endParaRPr lang="en-US" dirty="0"/>
+          </a:p>
+        </p:txBody>
+      </p:sp>
+      <p:sp>
+        <p:nvSpPr>
+          <p:cNvPr id="4" name="Slide Number Placeholder 3"/>
+          <p:cNvSpPr>
+            <a:spLocks noGrp="1"/>
+          </p:cNvSpPr>
+          <p:nvPr>
+            <p:ph type="sldNum" sz="quarter" idx="5"/>
+          </p:nvPr>
+        </p:nvSpPr>
+        <p:spPr/>
+        <p:txBody>
+          <a:bodyPr/>
+          <a:lstStyle/>
+          <a:p>
+            <a:fld id="{117D17FD-8842-8E4F-8C3E-EC8B634B2D5A}" type="slidenum">
+              <a:rPr lang="en-US" smtClean="0"/>
+              <a:t>9</a:t>
+            </a:fld>
+            <a:endParaRPr lang="en-US"/>
+          </a:p>
+        </p:txBody>
+      </p:sp>
+    </p:spTree>
+    <p:extLst>
+      <p:ext uri="{BB962C8B-B14F-4D97-AF65-F5344CB8AC3E}">
+        <p14:creationId xmlns:p14="http://schemas.microsoft.com/office/powerpoint/2010/main" val="2692415501"/>
+      </p:ext>
+    </p:extLst>
+  </p:cSld>
+  <p:clrMapOvr>
+    <a:masterClrMapping/>
+  </p:clrMapOvr>
+</p:notes>
+</file>
+
 <file path=ppt/slideLayouts/slideLayout1.xml><?xml version="1.0" encoding="utf-8"?>
 <p:sldLayout xmlns:a="http://schemas.openxmlformats.org/drawingml/2006/main" xmlns:r="http://schemas.openxmlformats.org/officeDocument/2006/relationships" xmlns:p="http://schemas.openxmlformats.org/presentationml/2006/main" type="title" preserve="1">
   <p:cSld name="Title Slide">
@@ -760,7 +2221,7 @@
           <a:p>
             <a:fld id="{1BF61C71-767E-B84C-BFB3-7B18856D27F4}" type="datetimeFigureOut">
               <a:rPr lang="en-US" smtClean="0"/>
-              <a:t>8/24/2026</a:t>
+              <a:t>8/29/2026</a:t>
             </a:fld>
             <a:endParaRPr lang="en-US"/>
           </a:p>
@@ -968,7 +2429,7 @@
           <a:p>
             <a:fld id="{1BF61C71-767E-B84C-BFB3-7B18856D27F4}" type="datetimeFigureOut">
               <a:rPr lang="en-US" smtClean="0"/>
-              <a:t>8/24/2026</a:t>
+              <a:t>8/29/2026</a:t>
             </a:fld>
             <a:endParaRPr lang="en-US"/>
           </a:p>
@@ -1186,7 +2647,7 @@
           <a:p>
             <a:fld id="{1BF61C71-767E-B84C-BFB3-7B18856D27F4}" type="datetimeFigureOut">
               <a:rPr lang="en-US" smtClean="0"/>
-              <a:t>8/24/2026</a:t>
+              <a:t>8/29/2026</a:t>
             </a:fld>
             <a:endParaRPr lang="en-US"/>
           </a:p>
@@ -1394,7 +2855,7 @@
           <a:p>
             <a:fld id="{1BF61C71-767E-B84C-BFB3-7B18856D27F4}" type="datetimeFigureOut">
               <a:rPr lang="en-US" smtClean="0"/>
-              <a:t>8/24/2026</a:t>
+              <a:t>8/29/2026</a:t>
             </a:fld>
             <a:endParaRPr lang="en-US"/>
           </a:p>
@@ -1678,7 +3139,7 @@
           <a:p>
             <a:fld id="{1BF61C71-767E-B84C-BFB3-7B18856D27F4}" type="datetimeFigureOut">
               <a:rPr lang="en-US" smtClean="0"/>
-              <a:t>8/24/2026</a:t>
+              <a:t>8/29/2026</a:t>
             </a:fld>
             <a:endParaRPr lang="en-US"/>
           </a:p>
@@ -1954,7 +3415,7 @@
           <a:p>
             <a:fld id="{1BF61C71-767E-B84C-BFB3-7B18856D27F4}" type="datetimeFigureOut">
               <a:rPr lang="en-US" smtClean="0"/>
-              <a:t>8/24/2026</a:t>
+              <a:t>8/29/2026</a:t>
             </a:fld>
             <a:endParaRPr lang="en-US"/>
           </a:p>
@@ -2377,7 +3838,7 @@
           <a:p>
             <a:fld id="{1BF61C71-767E-B84C-BFB3-7B18856D27F4}" type="datetimeFigureOut">
               <a:rPr lang="en-US" smtClean="0"/>
-              <a:t>8/24/2026</a:t>
+              <a:t>8/29/2026</a:t>
             </a:fld>
             <a:endParaRPr lang="en-US"/>
           </a:p>
@@ -2527,7 +3988,7 @@
           <a:p>
             <a:fld id="{1BF61C71-767E-B84C-BFB3-7B18856D27F4}" type="datetimeFigureOut">
               <a:rPr lang="en-US" smtClean="0"/>
-              <a:t>8/24/2026</a:t>
+              <a:t>8/29/2026</a:t>
             </a:fld>
             <a:endParaRPr lang="en-US"/>
           </a:p>
@@ -2648,7 +4109,7 @@
           <a:p>
             <a:fld id="{1BF61C71-767E-B84C-BFB3-7B18856D27F4}" type="datetimeFigureOut">
               <a:rPr lang="en-US" smtClean="0"/>
-              <a:t>8/24/2026</a:t>
+              <a:t>8/29/2026</a:t>
             </a:fld>
             <a:endParaRPr lang="en-US"/>
           </a:p>
@@ -2969,7 +4430,7 @@
           <a:p>
             <a:fld id="{1BF61C71-767E-B84C-BFB3-7B18856D27F4}" type="datetimeFigureOut">
               <a:rPr lang="en-US" smtClean="0"/>
-              <a:t>8/24/2026</a:t>
+              <a:t>8/29/2026</a:t>
             </a:fld>
             <a:endParaRPr lang="en-US"/>
           </a:p>
@@ -3266,7 +4727,7 @@
           <a:p>
             <a:fld id="{1BF61C71-767E-B84C-BFB3-7B18856D27F4}" type="datetimeFigureOut">
               <a:rPr lang="en-US" smtClean="0"/>
-              <a:t>8/24/2026</a:t>
+              <a:t>8/29/2026</a:t>
             </a:fld>
             <a:endParaRPr lang="en-US"/>
           </a:p>
@@ -3520,7 +4981,7 @@
           <a:p>
             <a:fld id="{1BF61C71-767E-B84C-BFB3-7B18856D27F4}" type="datetimeFigureOut">
               <a:rPr lang="en-US" smtClean="0"/>
-              <a:t>8/24/2026</a:t>
+              <a:t>8/29/2026</a:t>
             </a:fld>
             <a:endParaRPr lang="en-US"/>
           </a:p>
@@ -4456,14 +5917,48 @@
             <a:endParaRPr lang="en-US" dirty="0"/>
           </a:p>
           <a:p>
-            <a:pPr marL="0" indent="0">
-              <a:buNone/>
-            </a:pPr>
-            <a:r>
-              <a:rPr lang="en-US" dirty="0"/>
-              <a:t>Example:</a:t>
-            </a:r>
-          </a:p>
+            <a:endParaRPr lang="en-US" dirty="0"/>
+          </a:p>
+        </p:txBody>
+      </p:sp>
+      <p:sp>
+        <p:nvSpPr>
+          <p:cNvPr id="5" name="Rectangle: Rounded Corners 4">
+            <a:extLst>
+              <a:ext uri="{FF2B5EF4-FFF2-40B4-BE49-F238E27FC236}">
+                <a16:creationId xmlns:a16="http://schemas.microsoft.com/office/drawing/2014/main" id="{15AB17EE-1C8D-2274-6614-0BF0F7BE423D}"/>
+              </a:ext>
+            </a:extLst>
+          </p:cNvPr>
+          <p:cNvSpPr/>
+          <p:nvPr/>
+        </p:nvSpPr>
+        <p:spPr>
+          <a:xfrm>
+            <a:off x="838200" y="4014329"/>
+            <a:ext cx="3886200" cy="914400"/>
+          </a:xfrm>
+          <a:prstGeom prst="roundRect">
+            <a:avLst/>
+          </a:prstGeom>
+        </p:spPr>
+        <p:style>
+          <a:lnRef idx="1">
+            <a:schemeClr val="accent2"/>
+          </a:lnRef>
+          <a:fillRef idx="2">
+            <a:schemeClr val="accent2"/>
+          </a:fillRef>
+          <a:effectRef idx="1">
+            <a:schemeClr val="accent2"/>
+          </a:effectRef>
+          <a:fontRef idx="minor">
+            <a:schemeClr val="dk1"/>
+          </a:fontRef>
+        </p:style>
+        <p:txBody>
+          <a:bodyPr rtlCol="0" anchor="ctr"/>
+          <a:lstStyle/>
           <a:p>
             <a:r>
               <a:rPr lang="en-US" dirty="0"/>
@@ -4478,15 +5973,302 @@
               <a:t> poorer shooting?</a:t>
             </a:r>
           </a:p>
-          <a:p>
-            <a:pPr lvl="1"/>
-            <a:r>
-              <a:rPr lang="en-US" dirty="0"/>
-              <a:t>How do we use analytics to answer this?</a:t>
-            </a:r>
-          </a:p>
-          <a:p>
-            <a:endParaRPr lang="en-US" dirty="0"/>
+        </p:txBody>
+      </p:sp>
+      <p:sp>
+        <p:nvSpPr>
+          <p:cNvPr id="7" name="Rectangle: Rounded Corners 6">
+            <a:extLst>
+              <a:ext uri="{FF2B5EF4-FFF2-40B4-BE49-F238E27FC236}">
+                <a16:creationId xmlns:a16="http://schemas.microsoft.com/office/drawing/2014/main" id="{DD35E15B-C06C-3BED-8074-D929866F1D3D}"/>
+              </a:ext>
+            </a:extLst>
+          </p:cNvPr>
+          <p:cNvSpPr/>
+          <p:nvPr/>
+        </p:nvSpPr>
+        <p:spPr>
+          <a:xfrm>
+            <a:off x="7025640" y="2475089"/>
+            <a:ext cx="3886200" cy="914400"/>
+          </a:xfrm>
+          <a:prstGeom prst="roundRect">
+            <a:avLst/>
+          </a:prstGeom>
+        </p:spPr>
+        <p:style>
+          <a:lnRef idx="1">
+            <a:schemeClr val="accent6"/>
+          </a:lnRef>
+          <a:fillRef idx="2">
+            <a:schemeClr val="accent6"/>
+          </a:fillRef>
+          <a:effectRef idx="1">
+            <a:schemeClr val="accent6"/>
+          </a:effectRef>
+          <a:fontRef idx="minor">
+            <a:schemeClr val="dk1"/>
+          </a:fontRef>
+        </p:style>
+        <p:txBody>
+          <a:bodyPr rtlCol="0" anchor="ctr"/>
+          <a:lstStyle/>
+          <a:p>
+            <a:pPr lvl="0"/>
+            <a:r>
+              <a:rPr lang="en-US" dirty="0"/>
+              <a:t>Was greater workload </a:t>
+            </a:r>
+            <a:r>
+              <a:rPr lang="en-US" b="1" dirty="0"/>
+              <a:t>associated with</a:t>
+            </a:r>
+            <a:r>
+              <a:rPr lang="en-US" dirty="0"/>
+              <a:t> poorer shooting?</a:t>
+            </a:r>
+          </a:p>
+        </p:txBody>
+      </p:sp>
+      <p:sp>
+        <p:nvSpPr>
+          <p:cNvPr id="9" name="Rectangle: Rounded Corners 8">
+            <a:extLst>
+              <a:ext uri="{FF2B5EF4-FFF2-40B4-BE49-F238E27FC236}">
+                <a16:creationId xmlns:a16="http://schemas.microsoft.com/office/drawing/2014/main" id="{6E3F528D-537A-E0B0-6E17-4554442C41D7}"/>
+              </a:ext>
+            </a:extLst>
+          </p:cNvPr>
+          <p:cNvSpPr/>
+          <p:nvPr/>
+        </p:nvSpPr>
+        <p:spPr>
+          <a:xfrm>
+            <a:off x="7025640" y="4014329"/>
+            <a:ext cx="3886200" cy="914400"/>
+          </a:xfrm>
+          <a:prstGeom prst="roundRect">
+            <a:avLst/>
+          </a:prstGeom>
+        </p:spPr>
+        <p:style>
+          <a:lnRef idx="1">
+            <a:schemeClr val="accent6"/>
+          </a:lnRef>
+          <a:fillRef idx="2">
+            <a:schemeClr val="accent6"/>
+          </a:fillRef>
+          <a:effectRef idx="1">
+            <a:schemeClr val="accent6"/>
+          </a:effectRef>
+          <a:fontRef idx="minor">
+            <a:schemeClr val="dk1"/>
+          </a:fontRef>
+        </p:style>
+        <p:txBody>
+          <a:bodyPr rtlCol="0" anchor="ctr"/>
+          <a:lstStyle/>
+          <a:p>
+            <a:pPr lvl="0"/>
+            <a:r>
+              <a:rPr lang="en-US" dirty="0"/>
+              <a:t>Did poorer shooting occur </a:t>
+            </a:r>
+            <a:r>
+              <a:rPr lang="en-US" b="1" dirty="0"/>
+              <a:t>after</a:t>
+            </a:r>
+            <a:r>
+              <a:rPr lang="en-US" dirty="0"/>
+              <a:t> periods of greater workload?</a:t>
+            </a:r>
+          </a:p>
+        </p:txBody>
+      </p:sp>
+      <p:sp>
+        <p:nvSpPr>
+          <p:cNvPr id="11" name="Rectangle: Rounded Corners 10">
+            <a:extLst>
+              <a:ext uri="{FF2B5EF4-FFF2-40B4-BE49-F238E27FC236}">
+                <a16:creationId xmlns:a16="http://schemas.microsoft.com/office/drawing/2014/main" id="{F45CBF18-896D-373A-62FC-37A7FB13F6E2}"/>
+              </a:ext>
+            </a:extLst>
+          </p:cNvPr>
+          <p:cNvSpPr/>
+          <p:nvPr/>
+        </p:nvSpPr>
+        <p:spPr>
+          <a:xfrm>
+            <a:off x="7025640" y="5426685"/>
+            <a:ext cx="3886200" cy="914400"/>
+          </a:xfrm>
+          <a:prstGeom prst="roundRect">
+            <a:avLst/>
+          </a:prstGeom>
+        </p:spPr>
+        <p:style>
+          <a:lnRef idx="1">
+            <a:schemeClr val="accent6"/>
+          </a:lnRef>
+          <a:fillRef idx="2">
+            <a:schemeClr val="accent6"/>
+          </a:fillRef>
+          <a:effectRef idx="1">
+            <a:schemeClr val="accent6"/>
+          </a:effectRef>
+          <a:fontRef idx="minor">
+            <a:schemeClr val="dk1"/>
+          </a:fontRef>
+        </p:style>
+        <p:txBody>
+          <a:bodyPr rtlCol="0" anchor="ctr"/>
+          <a:lstStyle/>
+          <a:p>
+            <a:pPr lvl="0"/>
+            <a:r>
+              <a:rPr lang="en-US" dirty="0"/>
+              <a:t>Do players with greater workload </a:t>
+            </a:r>
+            <a:r>
+              <a:rPr lang="en-US" b="1" dirty="0"/>
+              <a:t>tend to</a:t>
+            </a:r>
+            <a:r>
+              <a:rPr lang="en-US" dirty="0"/>
+              <a:t> shoot worse?</a:t>
+            </a:r>
+          </a:p>
+        </p:txBody>
+      </p:sp>
+      <p:sp>
+        <p:nvSpPr>
+          <p:cNvPr id="13" name="Arrow: Right 12">
+            <a:extLst>
+              <a:ext uri="{FF2B5EF4-FFF2-40B4-BE49-F238E27FC236}">
+                <a16:creationId xmlns:a16="http://schemas.microsoft.com/office/drawing/2014/main" id="{A39209B1-5695-EACE-CC19-D1ECA99D3403}"/>
+              </a:ext>
+            </a:extLst>
+          </p:cNvPr>
+          <p:cNvSpPr/>
+          <p:nvPr/>
+        </p:nvSpPr>
+        <p:spPr>
+          <a:xfrm rot="19698657">
+            <a:off x="4922521" y="3439276"/>
+            <a:ext cx="1722120" cy="410930"/>
+          </a:xfrm>
+          <a:prstGeom prst="rightArrow">
+            <a:avLst/>
+          </a:prstGeom>
+        </p:spPr>
+        <p:style>
+          <a:lnRef idx="1">
+            <a:schemeClr val="dk1"/>
+          </a:lnRef>
+          <a:fillRef idx="2">
+            <a:schemeClr val="dk1"/>
+          </a:fillRef>
+          <a:effectRef idx="1">
+            <a:schemeClr val="dk1"/>
+          </a:effectRef>
+          <a:fontRef idx="minor">
+            <a:schemeClr val="dk1"/>
+          </a:fontRef>
+        </p:style>
+        <p:txBody>
+          <a:bodyPr rtlCol="0" anchor="ctr"/>
+          <a:lstStyle/>
+          <a:p>
+            <a:pPr algn="ctr"/>
+            <a:endParaRPr lang="en-US"/>
+          </a:p>
+        </p:txBody>
+      </p:sp>
+      <p:sp>
+        <p:nvSpPr>
+          <p:cNvPr id="15" name="Arrow: Right 14">
+            <a:extLst>
+              <a:ext uri="{FF2B5EF4-FFF2-40B4-BE49-F238E27FC236}">
+                <a16:creationId xmlns:a16="http://schemas.microsoft.com/office/drawing/2014/main" id="{5D439A93-EA20-9FD7-812D-79CADF738495}"/>
+              </a:ext>
+            </a:extLst>
+          </p:cNvPr>
+          <p:cNvSpPr/>
+          <p:nvPr/>
+        </p:nvSpPr>
+        <p:spPr>
+          <a:xfrm rot="1575899">
+            <a:off x="4915880" y="5221220"/>
+            <a:ext cx="1722120" cy="410930"/>
+          </a:xfrm>
+          <a:prstGeom prst="rightArrow">
+            <a:avLst/>
+          </a:prstGeom>
+        </p:spPr>
+        <p:style>
+          <a:lnRef idx="1">
+            <a:schemeClr val="dk1"/>
+          </a:lnRef>
+          <a:fillRef idx="2">
+            <a:schemeClr val="dk1"/>
+          </a:fillRef>
+          <a:effectRef idx="1">
+            <a:schemeClr val="dk1"/>
+          </a:effectRef>
+          <a:fontRef idx="minor">
+            <a:schemeClr val="dk1"/>
+          </a:fontRef>
+        </p:style>
+        <p:txBody>
+          <a:bodyPr rtlCol="0" anchor="ctr"/>
+          <a:lstStyle/>
+          <a:p>
+            <a:pPr algn="ctr"/>
+            <a:endParaRPr lang="en-US"/>
+          </a:p>
+        </p:txBody>
+      </p:sp>
+      <p:sp>
+        <p:nvSpPr>
+          <p:cNvPr id="17" name="Arrow: Right 16">
+            <a:extLst>
+              <a:ext uri="{FF2B5EF4-FFF2-40B4-BE49-F238E27FC236}">
+                <a16:creationId xmlns:a16="http://schemas.microsoft.com/office/drawing/2014/main" id="{25FCCFEF-9E47-557B-6BA0-C86392F3931D}"/>
+              </a:ext>
+            </a:extLst>
+          </p:cNvPr>
+          <p:cNvSpPr/>
+          <p:nvPr/>
+        </p:nvSpPr>
+        <p:spPr>
+          <a:xfrm>
+            <a:off x="5090160" y="4284499"/>
+            <a:ext cx="1722120" cy="410930"/>
+          </a:xfrm>
+          <a:prstGeom prst="rightArrow">
+            <a:avLst/>
+          </a:prstGeom>
+        </p:spPr>
+        <p:style>
+          <a:lnRef idx="1">
+            <a:schemeClr val="dk1"/>
+          </a:lnRef>
+          <a:fillRef idx="2">
+            <a:schemeClr val="dk1"/>
+          </a:fillRef>
+          <a:effectRef idx="1">
+            <a:schemeClr val="dk1"/>
+          </a:effectRef>
+          <a:fontRef idx="minor">
+            <a:schemeClr val="dk1"/>
+          </a:fontRef>
+        </p:style>
+        <p:txBody>
+          <a:bodyPr rtlCol="0" anchor="ctr"/>
+          <a:lstStyle/>
+          <a:p>
+            <a:pPr algn="ctr"/>
+            <a:endParaRPr lang="en-US"/>
           </a:p>
         </p:txBody>
       </p:sp>
@@ -4525,7 +6307,7 @@
           <p:cNvPr id="2" name="Title 1">
             <a:extLst>
               <a:ext uri="{FF2B5EF4-FFF2-40B4-BE49-F238E27FC236}">
-                <a16:creationId xmlns:a16="http://schemas.microsoft.com/office/drawing/2014/main" id="{6BE7DCDA-1C4B-859C-C26B-60BFA6DC98D5}"/>
+                <a16:creationId xmlns:a16="http://schemas.microsoft.com/office/drawing/2014/main" id="{6BD759E2-1C1A-7CE5-CB2C-221AD9773C76}"/>
               </a:ext>
             </a:extLst>
           </p:cNvPr>
@@ -4538,371 +6320,121 @@
         </p:nvSpPr>
         <p:spPr/>
         <p:txBody>
-          <a:bodyPr/>
-          <a:lstStyle/>
-          <a:p>
-            <a:r>
-              <a:rPr lang="en-US" dirty="0"/>
-              <a:t>Warning on Causal Language</a:t>
-            </a:r>
-          </a:p>
-        </p:txBody>
-      </p:sp>
-      <p:sp>
-        <p:nvSpPr>
-          <p:cNvPr id="5" name="Rectangle: Rounded Corners 4">
-            <a:extLst>
-              <a:ext uri="{FF2B5EF4-FFF2-40B4-BE49-F238E27FC236}">
-                <a16:creationId xmlns:a16="http://schemas.microsoft.com/office/drawing/2014/main" id="{60C0F7EF-25AA-628F-6978-C1275E8CC25B}"/>
-              </a:ext>
-            </a:extLst>
-          </p:cNvPr>
-          <p:cNvSpPr/>
-          <p:nvPr/>
-        </p:nvSpPr>
-        <p:spPr>
-          <a:xfrm>
-            <a:off x="1082040" y="3337010"/>
-            <a:ext cx="3886200" cy="914400"/>
-          </a:xfrm>
-          <a:prstGeom prst="roundRect">
-            <a:avLst/>
-          </a:prstGeom>
-        </p:spPr>
-        <p:style>
-          <a:lnRef idx="1">
-            <a:schemeClr val="accent2"/>
-          </a:lnRef>
-          <a:fillRef idx="2">
-            <a:schemeClr val="accent2"/>
-          </a:fillRef>
-          <a:effectRef idx="1">
-            <a:schemeClr val="accent2"/>
-          </a:effectRef>
-          <a:fontRef idx="minor">
-            <a:schemeClr val="dk1"/>
-          </a:fontRef>
-        </p:style>
-        <p:txBody>
-          <a:bodyPr rtlCol="0" anchor="ctr"/>
-          <a:lstStyle/>
-          <a:p>
-            <a:r>
-              <a:rPr lang="en-US" dirty="0"/>
-              <a:t>Did greater workload </a:t>
-            </a:r>
-            <a:r>
-              <a:rPr lang="en-US" b="1" dirty="0"/>
-              <a:t>cause</a:t>
-            </a:r>
-            <a:r>
-              <a:rPr lang="en-US" dirty="0"/>
-              <a:t> poorer shooting?</a:t>
-            </a:r>
-          </a:p>
-        </p:txBody>
-      </p:sp>
-      <p:sp>
-        <p:nvSpPr>
-          <p:cNvPr id="7" name="Rectangle: Rounded Corners 6">
-            <a:extLst>
-              <a:ext uri="{FF2B5EF4-FFF2-40B4-BE49-F238E27FC236}">
-                <a16:creationId xmlns:a16="http://schemas.microsoft.com/office/drawing/2014/main" id="{64F9361A-5682-895D-99F1-C733CFB7F931}"/>
-              </a:ext>
-            </a:extLst>
-          </p:cNvPr>
-          <p:cNvSpPr/>
-          <p:nvPr/>
-        </p:nvSpPr>
-        <p:spPr>
-          <a:xfrm>
-            <a:off x="7269480" y="1797770"/>
-            <a:ext cx="3886200" cy="914400"/>
-          </a:xfrm>
-          <a:prstGeom prst="roundRect">
-            <a:avLst/>
-          </a:prstGeom>
-        </p:spPr>
-        <p:style>
-          <a:lnRef idx="1">
-            <a:schemeClr val="accent6"/>
-          </a:lnRef>
-          <a:fillRef idx="2">
-            <a:schemeClr val="accent6"/>
-          </a:fillRef>
-          <a:effectRef idx="1">
-            <a:schemeClr val="accent6"/>
-          </a:effectRef>
-          <a:fontRef idx="minor">
-            <a:schemeClr val="dk1"/>
-          </a:fontRef>
-        </p:style>
-        <p:txBody>
-          <a:bodyPr rtlCol="0" anchor="ctr"/>
-          <a:lstStyle/>
-          <a:p>
-            <a:pPr lvl="0"/>
-            <a:r>
-              <a:rPr lang="en-US" dirty="0"/>
-              <a:t>Was greater workload </a:t>
-            </a:r>
-            <a:r>
-              <a:rPr lang="en-US" b="1" dirty="0"/>
-              <a:t>associated with</a:t>
-            </a:r>
-            <a:r>
-              <a:rPr lang="en-US" dirty="0"/>
-              <a:t> poorer shooting?</a:t>
-            </a:r>
-          </a:p>
-        </p:txBody>
-      </p:sp>
-      <p:sp>
-        <p:nvSpPr>
-          <p:cNvPr id="9" name="Rectangle: Rounded Corners 8">
-            <a:extLst>
-              <a:ext uri="{FF2B5EF4-FFF2-40B4-BE49-F238E27FC236}">
-                <a16:creationId xmlns:a16="http://schemas.microsoft.com/office/drawing/2014/main" id="{D3EC3F53-EABB-99D4-DE94-181B6689B4DA}"/>
-              </a:ext>
-            </a:extLst>
-          </p:cNvPr>
-          <p:cNvSpPr/>
-          <p:nvPr/>
-        </p:nvSpPr>
-        <p:spPr>
-          <a:xfrm>
-            <a:off x="7269480" y="3337010"/>
-            <a:ext cx="3886200" cy="914400"/>
-          </a:xfrm>
-          <a:prstGeom prst="roundRect">
-            <a:avLst/>
-          </a:prstGeom>
-        </p:spPr>
-        <p:style>
-          <a:lnRef idx="1">
-            <a:schemeClr val="accent6"/>
-          </a:lnRef>
-          <a:fillRef idx="2">
-            <a:schemeClr val="accent6"/>
-          </a:fillRef>
-          <a:effectRef idx="1">
-            <a:schemeClr val="accent6"/>
-          </a:effectRef>
-          <a:fontRef idx="minor">
-            <a:schemeClr val="dk1"/>
-          </a:fontRef>
-        </p:style>
-        <p:txBody>
-          <a:bodyPr rtlCol="0" anchor="ctr"/>
-          <a:lstStyle/>
-          <a:p>
-            <a:pPr lvl="0"/>
-            <a:r>
-              <a:rPr lang="en-US" dirty="0"/>
-              <a:t>Did poorer shooting occur </a:t>
-            </a:r>
-            <a:r>
-              <a:rPr lang="en-US" b="1" dirty="0"/>
-              <a:t>after</a:t>
-            </a:r>
-            <a:r>
-              <a:rPr lang="en-US" dirty="0"/>
-              <a:t> periods of greater workload?</a:t>
-            </a:r>
-          </a:p>
-        </p:txBody>
-      </p:sp>
-      <p:sp>
-        <p:nvSpPr>
-          <p:cNvPr id="11" name="Rectangle: Rounded Corners 10">
-            <a:extLst>
-              <a:ext uri="{FF2B5EF4-FFF2-40B4-BE49-F238E27FC236}">
-                <a16:creationId xmlns:a16="http://schemas.microsoft.com/office/drawing/2014/main" id="{224625FE-2238-DA5F-37C3-F886B773F733}"/>
-              </a:ext>
-            </a:extLst>
-          </p:cNvPr>
-          <p:cNvSpPr/>
-          <p:nvPr/>
-        </p:nvSpPr>
-        <p:spPr>
-          <a:xfrm>
-            <a:off x="7269480" y="4749366"/>
-            <a:ext cx="3886200" cy="914400"/>
-          </a:xfrm>
-          <a:prstGeom prst="roundRect">
-            <a:avLst/>
-          </a:prstGeom>
-        </p:spPr>
-        <p:style>
-          <a:lnRef idx="1">
-            <a:schemeClr val="accent6"/>
-          </a:lnRef>
-          <a:fillRef idx="2">
-            <a:schemeClr val="accent6"/>
-          </a:fillRef>
-          <a:effectRef idx="1">
-            <a:schemeClr val="accent6"/>
-          </a:effectRef>
-          <a:fontRef idx="minor">
-            <a:schemeClr val="dk1"/>
-          </a:fontRef>
-        </p:style>
-        <p:txBody>
-          <a:bodyPr rtlCol="0" anchor="ctr"/>
-          <a:lstStyle/>
-          <a:p>
-            <a:pPr lvl="0"/>
-            <a:r>
-              <a:rPr lang="en-US" dirty="0"/>
-              <a:t>Do players with greater workload </a:t>
-            </a:r>
-            <a:r>
-              <a:rPr lang="en-US" b="1" dirty="0"/>
-              <a:t>tend to</a:t>
-            </a:r>
-            <a:r>
-              <a:rPr lang="en-US" dirty="0"/>
-              <a:t> shoot worse?</a:t>
-            </a:r>
-          </a:p>
-        </p:txBody>
-      </p:sp>
-      <p:sp>
-        <p:nvSpPr>
-          <p:cNvPr id="12" name="Arrow: Right 11">
-            <a:extLst>
-              <a:ext uri="{FF2B5EF4-FFF2-40B4-BE49-F238E27FC236}">
-                <a16:creationId xmlns:a16="http://schemas.microsoft.com/office/drawing/2014/main" id="{9B2E3A77-635E-466A-691E-4ECDE72AA067}"/>
-              </a:ext>
-            </a:extLst>
-          </p:cNvPr>
-          <p:cNvSpPr/>
-          <p:nvPr/>
-        </p:nvSpPr>
-        <p:spPr>
-          <a:xfrm rot="19698657">
-            <a:off x="5166361" y="2761957"/>
-            <a:ext cx="1722120" cy="410930"/>
-          </a:xfrm>
-          <a:prstGeom prst="rightArrow">
-            <a:avLst/>
-          </a:prstGeom>
-        </p:spPr>
-        <p:style>
-          <a:lnRef idx="1">
-            <a:schemeClr val="dk1"/>
-          </a:lnRef>
-          <a:fillRef idx="2">
-            <a:schemeClr val="dk1"/>
-          </a:fillRef>
-          <a:effectRef idx="1">
-            <a:schemeClr val="dk1"/>
-          </a:effectRef>
-          <a:fontRef idx="minor">
-            <a:schemeClr val="dk1"/>
-          </a:fontRef>
-        </p:style>
-        <p:txBody>
-          <a:bodyPr rtlCol="0" anchor="ctr"/>
-          <a:lstStyle/>
-          <a:p>
-            <a:pPr algn="ctr"/>
-            <a:endParaRPr lang="en-US"/>
-          </a:p>
-        </p:txBody>
-      </p:sp>
-      <p:sp>
-        <p:nvSpPr>
-          <p:cNvPr id="14" name="Arrow: Right 13">
-            <a:extLst>
-              <a:ext uri="{FF2B5EF4-FFF2-40B4-BE49-F238E27FC236}">
-                <a16:creationId xmlns:a16="http://schemas.microsoft.com/office/drawing/2014/main" id="{3BEB6DAC-07E5-58E9-D030-77B419393F5D}"/>
-              </a:ext>
-            </a:extLst>
-          </p:cNvPr>
-          <p:cNvSpPr/>
-          <p:nvPr/>
-        </p:nvSpPr>
-        <p:spPr>
-          <a:xfrm rot="1575899">
-            <a:off x="5159720" y="4543901"/>
-            <a:ext cx="1722120" cy="410930"/>
-          </a:xfrm>
-          <a:prstGeom prst="rightArrow">
-            <a:avLst/>
-          </a:prstGeom>
-        </p:spPr>
-        <p:style>
-          <a:lnRef idx="1">
-            <a:schemeClr val="dk1"/>
-          </a:lnRef>
-          <a:fillRef idx="2">
-            <a:schemeClr val="dk1"/>
-          </a:fillRef>
-          <a:effectRef idx="1">
-            <a:schemeClr val="dk1"/>
-          </a:effectRef>
-          <a:fontRef idx="minor">
-            <a:schemeClr val="dk1"/>
-          </a:fontRef>
-        </p:style>
-        <p:txBody>
-          <a:bodyPr rtlCol="0" anchor="ctr"/>
-          <a:lstStyle/>
-          <a:p>
-            <a:pPr algn="ctr"/>
-            <a:endParaRPr lang="en-US"/>
-          </a:p>
-        </p:txBody>
-      </p:sp>
-      <p:sp>
-        <p:nvSpPr>
-          <p:cNvPr id="16" name="Arrow: Right 15">
-            <a:extLst>
-              <a:ext uri="{FF2B5EF4-FFF2-40B4-BE49-F238E27FC236}">
-                <a16:creationId xmlns:a16="http://schemas.microsoft.com/office/drawing/2014/main" id="{0387AC23-C88C-D546-BE93-E31B76BE88E9}"/>
-              </a:ext>
-            </a:extLst>
-          </p:cNvPr>
-          <p:cNvSpPr/>
-          <p:nvPr/>
-        </p:nvSpPr>
-        <p:spPr>
-          <a:xfrm>
-            <a:off x="5334000" y="3607180"/>
-            <a:ext cx="1722120" cy="410930"/>
-          </a:xfrm>
-          <a:prstGeom prst="rightArrow">
-            <a:avLst/>
-          </a:prstGeom>
-        </p:spPr>
-        <p:style>
-          <a:lnRef idx="1">
-            <a:schemeClr val="dk1"/>
-          </a:lnRef>
-          <a:fillRef idx="2">
-            <a:schemeClr val="dk1"/>
-          </a:fillRef>
-          <a:effectRef idx="1">
-            <a:schemeClr val="dk1"/>
-          </a:effectRef>
-          <a:fontRef idx="minor">
-            <a:schemeClr val="dk1"/>
-          </a:fontRef>
-        </p:style>
-        <p:txBody>
-          <a:bodyPr rtlCol="0" anchor="ctr"/>
-          <a:lstStyle/>
-          <a:p>
-            <a:pPr algn="ctr"/>
-            <a:endParaRPr lang="en-US"/>
+          <a:bodyPr>
+            <a:normAutofit/>
+          </a:bodyPr>
+          <a:lstStyle/>
+          <a:p>
+            <a:r>
+              <a:rPr lang="en-US" dirty="0"/>
+              <a:t>Activity: Diagnose the Question</a:t>
+            </a:r>
+          </a:p>
+        </p:txBody>
+      </p:sp>
+      <p:sp>
+        <p:nvSpPr>
+          <p:cNvPr id="3" name="Content Placeholder 2">
+            <a:extLst>
+              <a:ext uri="{FF2B5EF4-FFF2-40B4-BE49-F238E27FC236}">
+                <a16:creationId xmlns:a16="http://schemas.microsoft.com/office/drawing/2014/main" id="{3DE7B0D1-46A1-5634-D6AD-7D3096FA9020}"/>
+              </a:ext>
+            </a:extLst>
+          </p:cNvPr>
+          <p:cNvSpPr>
+            <a:spLocks noGrp="1"/>
+          </p:cNvSpPr>
+          <p:nvPr>
+            <p:ph idx="1"/>
+          </p:nvPr>
+        </p:nvSpPr>
+        <p:spPr/>
+        <p:txBody>
+          <a:bodyPr/>
+          <a:lstStyle/>
+          <a:p>
+            <a:pPr marL="0" indent="0" algn="ctr">
+              <a:buNone/>
+            </a:pPr>
+            <a:r>
+              <a:rPr lang="en-US" dirty="0"/>
+              <a:t>“Does time spent training affect performance?”</a:t>
+            </a:r>
+          </a:p>
+          <a:p>
+            <a:pPr marL="0" indent="0" algn="ctr">
+              <a:buNone/>
+            </a:pPr>
+            <a:endParaRPr lang="en-US" dirty="0"/>
+          </a:p>
+          <a:p>
+            <a:pPr marL="0" indent="0">
+              <a:buNone/>
+            </a:pPr>
+            <a:r>
+              <a:rPr lang="en-US" dirty="0"/>
+              <a:t>With your group, identify what is missing or ambiguous:</a:t>
+            </a:r>
+          </a:p>
+          <a:p>
+            <a:pPr lvl="1"/>
+            <a:r>
+              <a:rPr lang="en-US" dirty="0"/>
+              <a:t>What decision or purpose?</a:t>
+            </a:r>
+          </a:p>
+          <a:p>
+            <a:pPr lvl="1"/>
+            <a:r>
+              <a:rPr lang="en-US" dirty="0"/>
+              <a:t>What outcome?</a:t>
+            </a:r>
+          </a:p>
+          <a:p>
+            <a:pPr lvl="1"/>
+            <a:r>
+              <a:rPr lang="en-US" dirty="0"/>
+              <a:t>What comparison?</a:t>
+            </a:r>
+          </a:p>
+          <a:p>
+            <a:pPr lvl="1"/>
+            <a:r>
+              <a:rPr lang="en-US" dirty="0"/>
+              <a:t>Which athletes and timeframe?</a:t>
+            </a:r>
+          </a:p>
+          <a:p>
+            <a:pPr lvl="1"/>
+            <a:r>
+              <a:rPr lang="en-US" dirty="0"/>
+              <a:t>What does “affect” claim?</a:t>
+            </a:r>
+          </a:p>
+          <a:p>
+            <a:pPr marL="0" indent="0">
+              <a:buNone/>
+            </a:pPr>
+            <a:endParaRPr lang="en-US" dirty="0"/>
+          </a:p>
+          <a:p>
+            <a:pPr marL="0" indent="0">
+              <a:buNone/>
+            </a:pPr>
+            <a:r>
+              <a:rPr lang="en-US" dirty="0"/>
+              <a:t>Then rewrite the question.</a:t>
+            </a:r>
+          </a:p>
+          <a:p>
+            <a:endParaRPr lang="en-US" dirty="0"/>
           </a:p>
         </p:txBody>
       </p:sp>
     </p:spTree>
     <p:extLst>
       <p:ext uri="{BB962C8B-B14F-4D97-AF65-F5344CB8AC3E}">
-        <p14:creationId xmlns:p14="http://schemas.microsoft.com/office/powerpoint/2010/main" val="2525734627"/>
+        <p14:creationId xmlns:p14="http://schemas.microsoft.com/office/powerpoint/2010/main" val="3989916987"/>
       </p:ext>
     </p:extLst>
   </p:cSld>
@@ -4934,7 +6466,7 @@
           <p:cNvPr id="2" name="Title 1">
             <a:extLst>
               <a:ext uri="{FF2B5EF4-FFF2-40B4-BE49-F238E27FC236}">
-                <a16:creationId xmlns:a16="http://schemas.microsoft.com/office/drawing/2014/main" id="{6BD759E2-1C1A-7CE5-CB2C-221AD9773C76}"/>
+                <a16:creationId xmlns:a16="http://schemas.microsoft.com/office/drawing/2014/main" id="{02688DA3-B815-721E-25F1-04BC40E26E65}"/>
               </a:ext>
             </a:extLst>
           </p:cNvPr>
@@ -4947,52 +6479,75 @@
         </p:nvSpPr>
         <p:spPr/>
         <p:txBody>
+          <a:bodyPr/>
+          <a:lstStyle/>
+          <a:p>
+            <a:r>
+              <a:rPr lang="en-US" dirty="0"/>
+              <a:t>EXAMPLE solution</a:t>
+            </a:r>
+          </a:p>
+        </p:txBody>
+      </p:sp>
+      <p:sp>
+        <p:nvSpPr>
+          <p:cNvPr id="3" name="Content Placeholder 2">
+            <a:extLst>
+              <a:ext uri="{FF2B5EF4-FFF2-40B4-BE49-F238E27FC236}">
+                <a16:creationId xmlns:a16="http://schemas.microsoft.com/office/drawing/2014/main" id="{75544C5A-C549-20B6-95D0-05FBC22BCC0D}"/>
+              </a:ext>
+            </a:extLst>
+          </p:cNvPr>
+          <p:cNvSpPr>
+            <a:spLocks noGrp="1"/>
+          </p:cNvSpPr>
+          <p:nvPr>
+            <p:ph idx="1"/>
+          </p:nvPr>
+        </p:nvSpPr>
+        <p:spPr/>
+        <p:txBody>
           <a:bodyPr>
-            <a:normAutofit/>
+            <a:normAutofit lnSpcReduction="10000"/>
           </a:bodyPr>
           <a:lstStyle/>
           <a:p>
-            <a:r>
-              <a:rPr lang="en-US" dirty="0"/>
-              <a:t>Activity: Diagnose the Question</a:t>
-            </a:r>
-          </a:p>
-        </p:txBody>
-      </p:sp>
-      <p:sp>
-        <p:nvSpPr>
-          <p:cNvPr id="3" name="Content Placeholder 2">
-            <a:extLst>
-              <a:ext uri="{FF2B5EF4-FFF2-40B4-BE49-F238E27FC236}">
-                <a16:creationId xmlns:a16="http://schemas.microsoft.com/office/drawing/2014/main" id="{3DE7B0D1-46A1-5634-D6AD-7D3096FA9020}"/>
-              </a:ext>
-            </a:extLst>
-          </p:cNvPr>
-          <p:cNvSpPr>
-            <a:spLocks noGrp="1"/>
-          </p:cNvSpPr>
-          <p:nvPr>
-            <p:ph idx="1"/>
-          </p:nvPr>
-        </p:nvSpPr>
-        <p:spPr/>
-        <p:txBody>
-          <a:bodyPr/>
-          <a:lstStyle/>
-          <a:p>
-            <a:pPr marL="0" indent="0" algn="ctr">
+            <a:pPr marL="0" indent="0">
               <a:buNone/>
             </a:pPr>
             <a:r>
               <a:rPr lang="en-US" dirty="0"/>
-              <a:t>“Does time spent training affect performance?”</a:t>
-            </a:r>
-          </a:p>
-          <a:p>
-            <a:pPr marL="0" indent="0" algn="ctr">
+              <a:t>Decision</a:t>
+            </a:r>
+          </a:p>
+          <a:p>
+            <a:r>
+              <a:rPr lang="en-US" dirty="0"/>
+              <a:t>Should the coaching staff modify practice volume before games?</a:t>
+            </a:r>
+          </a:p>
+          <a:p>
+            <a:pPr marL="0" indent="0">
               <a:buNone/>
             </a:pPr>
-            <a:endParaRPr lang="en-US" dirty="0"/>
+            <a:r>
+              <a:rPr lang="en-US" dirty="0"/>
+              <a:t>Question</a:t>
+            </a:r>
+          </a:p>
+          <a:p>
+            <a:r>
+              <a:rPr lang="en-US" dirty="0"/>
+              <a:t>“Among players who appear in at least 15 minutes, is </a:t>
+            </a:r>
+            <a:r>
+              <a:rPr lang="en-US" dirty="0" err="1"/>
+              <a:t>PlayerLoad</a:t>
+            </a:r>
+            <a:r>
+              <a:rPr lang="en-US" dirty="0"/>
+              <a:t> accumulated during the two days before a game associated with fourth-quarter shooting efficiency?”</a:t>
+            </a:r>
           </a:p>
           <a:p>
             <a:pPr marL="0" indent="0">
@@ -5000,57 +6555,36 @@
             </a:pPr>
             <a:r>
               <a:rPr lang="en-US" dirty="0"/>
-              <a:t>With your group, identify what is missing or ambiguous:</a:t>
-            </a:r>
-          </a:p>
-          <a:p>
-            <a:pPr lvl="1"/>
-            <a:r>
-              <a:rPr lang="en-US" dirty="0"/>
-              <a:t>What decision or purpose?</a:t>
-            </a:r>
-          </a:p>
-          <a:p>
-            <a:pPr lvl="1"/>
-            <a:r>
-              <a:rPr lang="en-US" dirty="0"/>
-              <a:t>What outcome?</a:t>
-            </a:r>
-          </a:p>
-          <a:p>
-            <a:pPr lvl="1"/>
-            <a:r>
-              <a:rPr lang="en-US" dirty="0"/>
-              <a:t>What comparison?</a:t>
-            </a:r>
-          </a:p>
-          <a:p>
-            <a:pPr lvl="1"/>
-            <a:r>
-              <a:rPr lang="en-US" dirty="0"/>
-              <a:t>Which athletes and timeframe?</a:t>
-            </a:r>
-          </a:p>
-          <a:p>
-            <a:pPr lvl="1"/>
-            <a:r>
-              <a:rPr lang="en-US" dirty="0"/>
-              <a:t>What does “affect” claim?</a:t>
-            </a:r>
-          </a:p>
-          <a:p>
-            <a:pPr marL="0" indent="0">
-              <a:buNone/>
-            </a:pPr>
-            <a:endParaRPr lang="en-US" dirty="0"/>
-          </a:p>
-          <a:p>
-            <a:pPr marL="0" indent="0">
-              <a:buNone/>
-            </a:pPr>
-            <a:r>
-              <a:rPr lang="en-US" dirty="0"/>
-              <a:t>Then rewrite the question.</a:t>
+              <a:t>Still open for refinement</a:t>
+            </a:r>
+          </a:p>
+          <a:p>
+            <a:pPr lvl="0"/>
+            <a:r>
+              <a:rPr lang="en-US" dirty="0"/>
+              <a:t>Is </a:t>
+            </a:r>
+            <a:r>
+              <a:rPr lang="en-US" dirty="0" err="1"/>
+              <a:t>PlayerLoad</a:t>
+            </a:r>
+            <a:r>
+              <a:rPr lang="en-US" dirty="0"/>
+              <a:t> the most relevant measure?</a:t>
+            </a:r>
+          </a:p>
+          <a:p>
+            <a:pPr lvl="0"/>
+            <a:r>
+              <a:rPr lang="en-US" dirty="0"/>
+              <a:t>Is shooting efficiency the right outcome?</a:t>
+            </a:r>
+          </a:p>
+          <a:p>
+            <a:pPr lvl="0"/>
+            <a:r>
+              <a:rPr lang="en-US" dirty="0"/>
+              <a:t>What other context might explain the relationship?</a:t>
             </a:r>
           </a:p>
           <a:p>
@@ -5061,7 +6595,7 @@
     </p:spTree>
     <p:extLst>
       <p:ext uri="{BB962C8B-B14F-4D97-AF65-F5344CB8AC3E}">
-        <p14:creationId xmlns:p14="http://schemas.microsoft.com/office/powerpoint/2010/main" val="3989916987"/>
+        <p14:creationId xmlns:p14="http://schemas.microsoft.com/office/powerpoint/2010/main" val="4232202602"/>
       </p:ext>
     </p:extLst>
   </p:cSld>
@@ -5093,167 +6627,6 @@
           <p:cNvPr id="2" name="Title 1">
             <a:extLst>
               <a:ext uri="{FF2B5EF4-FFF2-40B4-BE49-F238E27FC236}">
-                <a16:creationId xmlns:a16="http://schemas.microsoft.com/office/drawing/2014/main" id="{02688DA3-B815-721E-25F1-04BC40E26E65}"/>
-              </a:ext>
-            </a:extLst>
-          </p:cNvPr>
-          <p:cNvSpPr>
-            <a:spLocks noGrp="1"/>
-          </p:cNvSpPr>
-          <p:nvPr>
-            <p:ph type="title"/>
-          </p:nvPr>
-        </p:nvSpPr>
-        <p:spPr/>
-        <p:txBody>
-          <a:bodyPr/>
-          <a:lstStyle/>
-          <a:p>
-            <a:r>
-              <a:rPr lang="en-US" dirty="0"/>
-              <a:t>EXAMPLE solution</a:t>
-            </a:r>
-          </a:p>
-        </p:txBody>
-      </p:sp>
-      <p:sp>
-        <p:nvSpPr>
-          <p:cNvPr id="3" name="Content Placeholder 2">
-            <a:extLst>
-              <a:ext uri="{FF2B5EF4-FFF2-40B4-BE49-F238E27FC236}">
-                <a16:creationId xmlns:a16="http://schemas.microsoft.com/office/drawing/2014/main" id="{75544C5A-C549-20B6-95D0-05FBC22BCC0D}"/>
-              </a:ext>
-            </a:extLst>
-          </p:cNvPr>
-          <p:cNvSpPr>
-            <a:spLocks noGrp="1"/>
-          </p:cNvSpPr>
-          <p:nvPr>
-            <p:ph idx="1"/>
-          </p:nvPr>
-        </p:nvSpPr>
-        <p:spPr/>
-        <p:txBody>
-          <a:bodyPr>
-            <a:normAutofit lnSpcReduction="10000"/>
-          </a:bodyPr>
-          <a:lstStyle/>
-          <a:p>
-            <a:pPr marL="0" indent="0">
-              <a:buNone/>
-            </a:pPr>
-            <a:r>
-              <a:rPr lang="en-US" dirty="0"/>
-              <a:t>Decision</a:t>
-            </a:r>
-          </a:p>
-          <a:p>
-            <a:r>
-              <a:rPr lang="en-US" dirty="0"/>
-              <a:t>Should the coaching staff modify practice volume before games?</a:t>
-            </a:r>
-          </a:p>
-          <a:p>
-            <a:pPr marL="0" indent="0">
-              <a:buNone/>
-            </a:pPr>
-            <a:r>
-              <a:rPr lang="en-US" dirty="0"/>
-              <a:t>Question</a:t>
-            </a:r>
-          </a:p>
-          <a:p>
-            <a:r>
-              <a:rPr lang="en-US" dirty="0"/>
-              <a:t>“Among players who appear in at least 15 minutes, is </a:t>
-            </a:r>
-            <a:r>
-              <a:rPr lang="en-US" dirty="0" err="1"/>
-              <a:t>PlayerLoad</a:t>
-            </a:r>
-            <a:r>
-              <a:rPr lang="en-US" dirty="0"/>
-              <a:t> accumulated during the two days before a game associated with fourth-quarter shooting efficiency?”</a:t>
-            </a:r>
-          </a:p>
-          <a:p>
-            <a:pPr marL="0" indent="0">
-              <a:buNone/>
-            </a:pPr>
-            <a:r>
-              <a:rPr lang="en-US" dirty="0"/>
-              <a:t>Still open for refinement</a:t>
-            </a:r>
-          </a:p>
-          <a:p>
-            <a:pPr lvl="0"/>
-            <a:r>
-              <a:rPr lang="en-US" dirty="0"/>
-              <a:t>Is </a:t>
-            </a:r>
-            <a:r>
-              <a:rPr lang="en-US" dirty="0" err="1"/>
-              <a:t>PlayerLoad</a:t>
-            </a:r>
-            <a:r>
-              <a:rPr lang="en-US" dirty="0"/>
-              <a:t> the most relevant measure?</a:t>
-            </a:r>
-          </a:p>
-          <a:p>
-            <a:pPr lvl="0"/>
-            <a:r>
-              <a:rPr lang="en-US" dirty="0"/>
-              <a:t>Is shooting efficiency the right outcome?</a:t>
-            </a:r>
-          </a:p>
-          <a:p>
-            <a:pPr lvl="0"/>
-            <a:r>
-              <a:rPr lang="en-US" dirty="0"/>
-              <a:t>What other context might explain the relationship?</a:t>
-            </a:r>
-          </a:p>
-          <a:p>
-            <a:endParaRPr lang="en-US" dirty="0"/>
-          </a:p>
-        </p:txBody>
-      </p:sp>
-    </p:spTree>
-    <p:extLst>
-      <p:ext uri="{BB962C8B-B14F-4D97-AF65-F5344CB8AC3E}">
-        <p14:creationId xmlns:p14="http://schemas.microsoft.com/office/powerpoint/2010/main" val="4232202602"/>
-      </p:ext>
-    </p:extLst>
-  </p:cSld>
-  <p:clrMapOvr>
-    <a:masterClrMapping/>
-  </p:clrMapOvr>
-</p:sld>
-</file>
-
-<file path=ppt/slides/slide15.xml><?xml version="1.0" encoding="utf-8"?>
-<p:sld xmlns:a="http://schemas.openxmlformats.org/drawingml/2006/main" xmlns:r="http://schemas.openxmlformats.org/officeDocument/2006/relationships" xmlns:p="http://schemas.openxmlformats.org/presentationml/2006/main">
-  <p:cSld>
-    <p:spTree>
-      <p:nvGrpSpPr>
-        <p:cNvPr id="1" name=""/>
-        <p:cNvGrpSpPr/>
-        <p:nvPr/>
-      </p:nvGrpSpPr>
-      <p:grpSpPr>
-        <a:xfrm>
-          <a:off x="0" y="0"/>
-          <a:ext cx="0" cy="0"/>
-          <a:chOff x="0" y="0"/>
-          <a:chExt cx="0" cy="0"/>
-        </a:xfrm>
-      </p:grpSpPr>
-      <p:sp>
-        <p:nvSpPr>
-          <p:cNvPr id="2" name="Title 1">
-            <a:extLst>
-              <a:ext uri="{FF2B5EF4-FFF2-40B4-BE49-F238E27FC236}">
                 <a16:creationId xmlns:a16="http://schemas.microsoft.com/office/drawing/2014/main" id="{0BDBAAC7-DF7D-29C6-A8D3-5240B7DB7A0E}"/>
               </a:ext>
             </a:extLst>
@@ -5294,7 +6667,7 @@
           </p:nvPr>
         </p:nvPicPr>
         <p:blipFill>
-          <a:blip r:embed="rId2"/>
+          <a:blip r:embed="rId3"/>
           <a:stretch>
             <a:fillRect/>
           </a:stretch>
@@ -5322,6 +6695,209 @@
 </p:sld>
 </file>
 
+<file path=ppt/slides/slide15.xml><?xml version="1.0" encoding="utf-8"?>
+<p:sld xmlns:a="http://schemas.openxmlformats.org/drawingml/2006/main" xmlns:r="http://schemas.openxmlformats.org/officeDocument/2006/relationships" xmlns:p="http://schemas.openxmlformats.org/presentationml/2006/main">
+  <p:cSld>
+    <p:spTree>
+      <p:nvGrpSpPr>
+        <p:cNvPr id="1" name=""/>
+        <p:cNvGrpSpPr/>
+        <p:nvPr/>
+      </p:nvGrpSpPr>
+      <p:grpSpPr>
+        <a:xfrm>
+          <a:off x="0" y="0"/>
+          <a:ext cx="0" cy="0"/>
+          <a:chOff x="0" y="0"/>
+          <a:chExt cx="0" cy="0"/>
+        </a:xfrm>
+      </p:grpSpPr>
+      <p:sp>
+        <p:nvSpPr>
+          <p:cNvPr id="2" name="Title 1">
+            <a:extLst>
+              <a:ext uri="{FF2B5EF4-FFF2-40B4-BE49-F238E27FC236}">
+                <a16:creationId xmlns:a16="http://schemas.microsoft.com/office/drawing/2014/main" id="{B81B6E85-EBC7-CD81-C65D-B8A10CED0D22}"/>
+              </a:ext>
+            </a:extLst>
+          </p:cNvPr>
+          <p:cNvSpPr>
+            <a:spLocks noGrp="1"/>
+          </p:cNvSpPr>
+          <p:nvPr>
+            <p:ph type="title"/>
+          </p:nvPr>
+        </p:nvSpPr>
+        <p:spPr/>
+        <p:txBody>
+          <a:bodyPr>
+            <a:normAutofit/>
+          </a:bodyPr>
+          <a:lstStyle/>
+          <a:p>
+            <a:r>
+              <a:rPr lang="en-US" dirty="0"/>
+              <a:t>Available Data Can Rewrite Questions</a:t>
+            </a:r>
+          </a:p>
+        </p:txBody>
+      </p:sp>
+      <p:sp>
+        <p:nvSpPr>
+          <p:cNvPr id="3" name="Content Placeholder 2">
+            <a:extLst>
+              <a:ext uri="{FF2B5EF4-FFF2-40B4-BE49-F238E27FC236}">
+                <a16:creationId xmlns:a16="http://schemas.microsoft.com/office/drawing/2014/main" id="{3B6E6309-FF70-EF25-84E6-99E073817CEE}"/>
+              </a:ext>
+            </a:extLst>
+          </p:cNvPr>
+          <p:cNvSpPr>
+            <a:spLocks noGrp="1"/>
+          </p:cNvSpPr>
+          <p:nvPr>
+            <p:ph idx="1"/>
+          </p:nvPr>
+        </p:nvSpPr>
+        <p:spPr/>
+        <p:txBody>
+          <a:bodyPr/>
+          <a:lstStyle/>
+          <a:p>
+            <a:pPr marL="0" indent="0">
+              <a:buNone/>
+            </a:pPr>
+            <a:r>
+              <a:rPr lang="en-US" dirty="0"/>
+              <a:t>Original concern</a:t>
+            </a:r>
+          </a:p>
+          <a:p>
+            <a:pPr lvl="1"/>
+            <a:r>
+              <a:rPr lang="en-US" dirty="0"/>
+              <a:t>Why does the team struggle to create good shots against zone defense?</a:t>
+            </a:r>
+          </a:p>
+          <a:p>
+            <a:pPr lvl="1"/>
+            <a:endParaRPr lang="en-US" dirty="0"/>
+          </a:p>
+          <a:p>
+            <a:pPr marL="0" indent="0">
+              <a:buNone/>
+            </a:pPr>
+            <a:r>
+              <a:rPr lang="en-US" dirty="0"/>
+              <a:t>Available spreadsheet</a:t>
+            </a:r>
+          </a:p>
+          <a:p>
+            <a:pPr lvl="1"/>
+            <a:r>
+              <a:rPr lang="en-US" dirty="0"/>
+              <a:t>Points, rebounds, assists, and minutes</a:t>
+            </a:r>
+          </a:p>
+          <a:p>
+            <a:pPr lvl="1"/>
+            <a:endParaRPr lang="en-US" dirty="0"/>
+          </a:p>
+          <a:p>
+            <a:pPr marL="0" indent="0">
+              <a:buNone/>
+            </a:pPr>
+            <a:r>
+              <a:rPr lang="en-US" dirty="0"/>
+              <a:t>Convenient replacement question</a:t>
+            </a:r>
+          </a:p>
+          <a:p>
+            <a:pPr lvl="1"/>
+            <a:r>
+              <a:rPr lang="en-US" dirty="0"/>
+              <a:t>Who scores the fewest points?</a:t>
+            </a:r>
+          </a:p>
+          <a:p>
+            <a:endParaRPr lang="en-US" dirty="0"/>
+          </a:p>
+        </p:txBody>
+      </p:sp>
+      <p:sp>
+        <p:nvSpPr>
+          <p:cNvPr id="5" name="TextBox 4">
+            <a:extLst>
+              <a:ext uri="{FF2B5EF4-FFF2-40B4-BE49-F238E27FC236}">
+                <a16:creationId xmlns:a16="http://schemas.microsoft.com/office/drawing/2014/main" id="{A61DB93B-31A9-49F1-6EC0-14F12A4B9A4D}"/>
+              </a:ext>
+            </a:extLst>
+          </p:cNvPr>
+          <p:cNvSpPr txBox="1"/>
+          <p:nvPr/>
+        </p:nvSpPr>
+        <p:spPr>
+          <a:xfrm>
+            <a:off x="1112520" y="5529347"/>
+            <a:ext cx="10241280" cy="415498"/>
+          </a:xfrm>
+          <a:prstGeom prst="rect">
+            <a:avLst/>
+          </a:prstGeom>
+          <a:noFill/>
+        </p:spPr>
+        <p:txBody>
+          <a:bodyPr wrap="square">
+            <a:spAutoFit/>
+          </a:bodyPr>
+          <a:lstStyle/>
+          <a:p>
+            <a:r>
+              <a:rPr lang="en-US" sz="2100" i="0" dirty="0">
+                <a:solidFill>
+                  <a:srgbClr val="841617"/>
+                </a:solidFill>
+                <a:effectLst/>
+                <a:latin typeface="Fira Sans" panose="020B0503050000020004" pitchFamily="34" charset="0"/>
+              </a:rPr>
+              <a:t>The replacement is answerable, but it </a:t>
+            </a:r>
+            <a:r>
+              <a:rPr lang="en-US" sz="2100" b="1" i="0" dirty="0">
+                <a:solidFill>
+                  <a:srgbClr val="841617"/>
+                </a:solidFill>
+                <a:effectLst/>
+                <a:latin typeface="Fira Sans" panose="020B0503050000020004" pitchFamily="34" charset="0"/>
+              </a:rPr>
+              <a:t>does not answer </a:t>
+            </a:r>
+            <a:r>
+              <a:rPr lang="en-US" sz="2100" i="0" dirty="0">
+                <a:solidFill>
+                  <a:srgbClr val="841617"/>
+                </a:solidFill>
+                <a:effectLst/>
+                <a:latin typeface="Fira Sans" panose="020B0503050000020004" pitchFamily="34" charset="0"/>
+              </a:rPr>
+              <a:t>the original concern.</a:t>
+            </a:r>
+            <a:endParaRPr lang="en-US" dirty="0"/>
+          </a:p>
+        </p:txBody>
+      </p:sp>
+    </p:spTree>
+    <p:extLst>
+      <p:ext uri="{BB962C8B-B14F-4D97-AF65-F5344CB8AC3E}">
+        <p14:creationId xmlns:p14="http://schemas.microsoft.com/office/powerpoint/2010/main" val="222991542"/>
+      </p:ext>
+    </p:extLst>
+  </p:cSld>
+  <p:clrMapOvr>
+    <a:masterClrMapping/>
+  </p:clrMapOvr>
+</p:sld>
+</file>
+
 <file path=ppt/slides/slide16.xml><?xml version="1.0" encoding="utf-8"?>
 <p:sld xmlns:a="http://schemas.openxmlformats.org/drawingml/2006/main" xmlns:r="http://schemas.openxmlformats.org/officeDocument/2006/relationships" xmlns:p="http://schemas.openxmlformats.org/presentationml/2006/main">
   <p:cSld>
@@ -5344,209 +6920,6 @@
           <p:cNvPr id="2" name="Title 1">
             <a:extLst>
               <a:ext uri="{FF2B5EF4-FFF2-40B4-BE49-F238E27FC236}">
-                <a16:creationId xmlns:a16="http://schemas.microsoft.com/office/drawing/2014/main" id="{B81B6E85-EBC7-CD81-C65D-B8A10CED0D22}"/>
-              </a:ext>
-            </a:extLst>
-          </p:cNvPr>
-          <p:cNvSpPr>
-            <a:spLocks noGrp="1"/>
-          </p:cNvSpPr>
-          <p:nvPr>
-            <p:ph type="title"/>
-          </p:nvPr>
-        </p:nvSpPr>
-        <p:spPr/>
-        <p:txBody>
-          <a:bodyPr>
-            <a:normAutofit/>
-          </a:bodyPr>
-          <a:lstStyle/>
-          <a:p>
-            <a:r>
-              <a:rPr lang="en-US" dirty="0"/>
-              <a:t>Available Data Can Rewrite Questions</a:t>
-            </a:r>
-          </a:p>
-        </p:txBody>
-      </p:sp>
-      <p:sp>
-        <p:nvSpPr>
-          <p:cNvPr id="3" name="Content Placeholder 2">
-            <a:extLst>
-              <a:ext uri="{FF2B5EF4-FFF2-40B4-BE49-F238E27FC236}">
-                <a16:creationId xmlns:a16="http://schemas.microsoft.com/office/drawing/2014/main" id="{3B6E6309-FF70-EF25-84E6-99E073817CEE}"/>
-              </a:ext>
-            </a:extLst>
-          </p:cNvPr>
-          <p:cNvSpPr>
-            <a:spLocks noGrp="1"/>
-          </p:cNvSpPr>
-          <p:nvPr>
-            <p:ph idx="1"/>
-          </p:nvPr>
-        </p:nvSpPr>
-        <p:spPr/>
-        <p:txBody>
-          <a:bodyPr/>
-          <a:lstStyle/>
-          <a:p>
-            <a:pPr marL="0" indent="0">
-              <a:buNone/>
-            </a:pPr>
-            <a:r>
-              <a:rPr lang="en-US" dirty="0"/>
-              <a:t>Original concern</a:t>
-            </a:r>
-          </a:p>
-          <a:p>
-            <a:pPr lvl="1"/>
-            <a:r>
-              <a:rPr lang="en-US" dirty="0"/>
-              <a:t>Why does the team struggle to create good shots against zone defense?</a:t>
-            </a:r>
-          </a:p>
-          <a:p>
-            <a:pPr lvl="1"/>
-            <a:endParaRPr lang="en-US" dirty="0"/>
-          </a:p>
-          <a:p>
-            <a:pPr marL="0" indent="0">
-              <a:buNone/>
-            </a:pPr>
-            <a:r>
-              <a:rPr lang="en-US" dirty="0"/>
-              <a:t>Available spreadsheet</a:t>
-            </a:r>
-          </a:p>
-          <a:p>
-            <a:pPr lvl="1"/>
-            <a:r>
-              <a:rPr lang="en-US" dirty="0"/>
-              <a:t>Points, rebounds, assists, and minutes</a:t>
-            </a:r>
-          </a:p>
-          <a:p>
-            <a:pPr lvl="1"/>
-            <a:endParaRPr lang="en-US" dirty="0"/>
-          </a:p>
-          <a:p>
-            <a:pPr marL="0" indent="0">
-              <a:buNone/>
-            </a:pPr>
-            <a:r>
-              <a:rPr lang="en-US" dirty="0"/>
-              <a:t>Convenient replacement question</a:t>
-            </a:r>
-          </a:p>
-          <a:p>
-            <a:pPr lvl="1"/>
-            <a:r>
-              <a:rPr lang="en-US" dirty="0"/>
-              <a:t>Who scores the fewest points?</a:t>
-            </a:r>
-          </a:p>
-          <a:p>
-            <a:endParaRPr lang="en-US" dirty="0"/>
-          </a:p>
-        </p:txBody>
-      </p:sp>
-      <p:sp>
-        <p:nvSpPr>
-          <p:cNvPr id="5" name="TextBox 4">
-            <a:extLst>
-              <a:ext uri="{FF2B5EF4-FFF2-40B4-BE49-F238E27FC236}">
-                <a16:creationId xmlns:a16="http://schemas.microsoft.com/office/drawing/2014/main" id="{A61DB93B-31A9-49F1-6EC0-14F12A4B9A4D}"/>
-              </a:ext>
-            </a:extLst>
-          </p:cNvPr>
-          <p:cNvSpPr txBox="1"/>
-          <p:nvPr/>
-        </p:nvSpPr>
-        <p:spPr>
-          <a:xfrm>
-            <a:off x="1112520" y="5529347"/>
-            <a:ext cx="10241280" cy="415498"/>
-          </a:xfrm>
-          <a:prstGeom prst="rect">
-            <a:avLst/>
-          </a:prstGeom>
-          <a:noFill/>
-        </p:spPr>
-        <p:txBody>
-          <a:bodyPr wrap="square">
-            <a:spAutoFit/>
-          </a:bodyPr>
-          <a:lstStyle/>
-          <a:p>
-            <a:r>
-              <a:rPr lang="en-US" sz="2100" i="0" dirty="0">
-                <a:solidFill>
-                  <a:srgbClr val="841617"/>
-                </a:solidFill>
-                <a:effectLst/>
-                <a:latin typeface="Fira Sans" panose="020B0503050000020004" pitchFamily="34" charset="0"/>
-              </a:rPr>
-              <a:t>The replacement is answerable, but it </a:t>
-            </a:r>
-            <a:r>
-              <a:rPr lang="en-US" sz="2100" b="1" i="0" dirty="0">
-                <a:solidFill>
-                  <a:srgbClr val="841617"/>
-                </a:solidFill>
-                <a:effectLst/>
-                <a:latin typeface="Fira Sans" panose="020B0503050000020004" pitchFamily="34" charset="0"/>
-              </a:rPr>
-              <a:t>does not answer </a:t>
-            </a:r>
-            <a:r>
-              <a:rPr lang="en-US" sz="2100" i="0" dirty="0">
-                <a:solidFill>
-                  <a:srgbClr val="841617"/>
-                </a:solidFill>
-                <a:effectLst/>
-                <a:latin typeface="Fira Sans" panose="020B0503050000020004" pitchFamily="34" charset="0"/>
-              </a:rPr>
-              <a:t>the original concern.</a:t>
-            </a:r>
-            <a:endParaRPr lang="en-US" dirty="0"/>
-          </a:p>
-        </p:txBody>
-      </p:sp>
-    </p:spTree>
-    <p:extLst>
-      <p:ext uri="{BB962C8B-B14F-4D97-AF65-F5344CB8AC3E}">
-        <p14:creationId xmlns:p14="http://schemas.microsoft.com/office/powerpoint/2010/main" val="222991542"/>
-      </p:ext>
-    </p:extLst>
-  </p:cSld>
-  <p:clrMapOvr>
-    <a:masterClrMapping/>
-  </p:clrMapOvr>
-</p:sld>
-</file>
-
-<file path=ppt/slides/slide17.xml><?xml version="1.0" encoding="utf-8"?>
-<p:sld xmlns:a="http://schemas.openxmlformats.org/drawingml/2006/main" xmlns:r="http://schemas.openxmlformats.org/officeDocument/2006/relationships" xmlns:p="http://schemas.openxmlformats.org/presentationml/2006/main">
-  <p:cSld>
-    <p:spTree>
-      <p:nvGrpSpPr>
-        <p:cNvPr id="1" name=""/>
-        <p:cNvGrpSpPr/>
-        <p:nvPr/>
-      </p:nvGrpSpPr>
-      <p:grpSpPr>
-        <a:xfrm>
-          <a:off x="0" y="0"/>
-          <a:ext cx="0" cy="0"/>
-          <a:chOff x="0" y="0"/>
-          <a:chExt cx="0" cy="0"/>
-        </a:xfrm>
-      </p:grpSpPr>
-      <p:sp>
-        <p:nvSpPr>
-          <p:cNvPr id="2" name="Title 1">
-            <a:extLst>
-              <a:ext uri="{FF2B5EF4-FFF2-40B4-BE49-F238E27FC236}">
                 <a16:creationId xmlns:a16="http://schemas.microsoft.com/office/drawing/2014/main" id="{E24D6458-5EC0-A179-B83C-16BDA007C0F4}"/>
               </a:ext>
             </a:extLst>
@@ -5779,7 +7152,7 @@
 </p:sld>
 </file>
 
-<file path=ppt/slides/slide18.xml><?xml version="1.0" encoding="utf-8"?>
+<file path=ppt/slides/slide17.xml><?xml version="1.0" encoding="utf-8"?>
 <p:sld xmlns:a="http://schemas.openxmlformats.org/drawingml/2006/main" xmlns:r="http://schemas.openxmlformats.org/officeDocument/2006/relationships" xmlns:p="http://schemas.openxmlformats.org/presentationml/2006/main">
   <p:cSld>
     <p:spTree>
@@ -5907,7 +7280,7 @@
 </p:sld>
 </file>
 
-<file path=ppt/slides/slide19.xml><?xml version="1.0" encoding="utf-8"?>
+<file path=ppt/slides/slide18.xml><?xml version="1.0" encoding="utf-8"?>
 <p:sld xmlns:a="http://schemas.openxmlformats.org/drawingml/2006/main" xmlns:r="http://schemas.openxmlformats.org/officeDocument/2006/relationships" xmlns:p="http://schemas.openxmlformats.org/presentationml/2006/main">
   <p:cSld>
     <p:spTree>
@@ -6023,6 +7396,98 @@
     <p:extLst>
       <p:ext uri="{BB962C8B-B14F-4D97-AF65-F5344CB8AC3E}">
         <p14:creationId xmlns:p14="http://schemas.microsoft.com/office/powerpoint/2010/main" val="2300462859"/>
+      </p:ext>
+    </p:extLst>
+  </p:cSld>
+  <p:clrMapOvr>
+    <a:masterClrMapping/>
+  </p:clrMapOvr>
+</p:sld>
+</file>
+
+<file path=ppt/slides/slide19.xml><?xml version="1.0" encoding="utf-8"?>
+<p:sld xmlns:a="http://schemas.openxmlformats.org/drawingml/2006/main" xmlns:r="http://schemas.openxmlformats.org/officeDocument/2006/relationships" xmlns:p="http://schemas.openxmlformats.org/presentationml/2006/main">
+  <p:cSld>
+    <p:spTree>
+      <p:nvGrpSpPr>
+        <p:cNvPr id="1" name=""/>
+        <p:cNvGrpSpPr/>
+        <p:nvPr/>
+      </p:nvGrpSpPr>
+      <p:grpSpPr>
+        <a:xfrm>
+          <a:off x="0" y="0"/>
+          <a:ext cx="0" cy="0"/>
+          <a:chOff x="0" y="0"/>
+          <a:chExt cx="0" cy="0"/>
+        </a:xfrm>
+      </p:grpSpPr>
+      <p:sp>
+        <p:nvSpPr>
+          <p:cNvPr id="2" name="Title 1">
+            <a:extLst>
+              <a:ext uri="{FF2B5EF4-FFF2-40B4-BE49-F238E27FC236}">
+                <a16:creationId xmlns:a16="http://schemas.microsoft.com/office/drawing/2014/main" id="{04303C95-9B08-B230-FD40-9ADA7D3DDA60}"/>
+              </a:ext>
+            </a:extLst>
+          </p:cNvPr>
+          <p:cNvSpPr>
+            <a:spLocks noGrp="1"/>
+          </p:cNvSpPr>
+          <p:nvPr>
+            <p:ph type="title"/>
+          </p:nvPr>
+        </p:nvSpPr>
+        <p:spPr/>
+        <p:txBody>
+          <a:bodyPr/>
+          <a:lstStyle/>
+          <a:p>
+            <a:r>
+              <a:rPr lang="en-US" dirty="0"/>
+              <a:t>Exploratory Analysis</a:t>
+            </a:r>
+          </a:p>
+        </p:txBody>
+      </p:sp>
+      <p:sp>
+        <p:nvSpPr>
+          <p:cNvPr id="3" name="Content Placeholder 2">
+            <a:extLst>
+              <a:ext uri="{FF2B5EF4-FFF2-40B4-BE49-F238E27FC236}">
+                <a16:creationId xmlns:a16="http://schemas.microsoft.com/office/drawing/2014/main" id="{F112E43C-65E3-0788-75F8-EF24FC9A3B60}"/>
+              </a:ext>
+            </a:extLst>
+          </p:cNvPr>
+          <p:cNvSpPr>
+            <a:spLocks noGrp="1"/>
+          </p:cNvSpPr>
+          <p:nvPr>
+            <p:ph idx="1"/>
+          </p:nvPr>
+        </p:nvSpPr>
+        <p:spPr/>
+        <p:txBody>
+          <a:bodyPr/>
+          <a:lstStyle/>
+          <a:p>
+            <a:r>
+              <a:rPr lang="en-US" dirty="0"/>
+              <a:t>This is a legitimate analytical pursuit but stops at descriptive analytics. </a:t>
+            </a:r>
+          </a:p>
+          <a:p>
+            <a:r>
+              <a:rPr lang="en-US" dirty="0"/>
+              <a:t>Valid diagnostic, predictive and prescriptive analytics requires direction from the start.</a:t>
+            </a:r>
+          </a:p>
+        </p:txBody>
+      </p:sp>
+    </p:spTree>
+    <p:extLst>
+      <p:ext uri="{BB962C8B-B14F-4D97-AF65-F5344CB8AC3E}">
+        <p14:creationId xmlns:p14="http://schemas.microsoft.com/office/powerpoint/2010/main" val="2941368931"/>
       </p:ext>
     </p:extLst>
   </p:cSld>
@@ -6352,7 +7817,7 @@
           <a:p>
             <a:r>
               <a:rPr lang="en-US" dirty="0"/>
-              <a:t>Group Project: Begin With the Problem</a:t>
+              <a:t>Group Project</a:t>
             </a:r>
           </a:p>
         </p:txBody>
@@ -6734,7 +8199,7 @@
           <a:p>
             <a:r>
               <a:rPr lang="en-US" dirty="0"/>
-              <a:t>Is the Question Worth Pursuing?</a:t>
+              <a:t>Is the Question Ready to be Pursued?</a:t>
             </a:r>
           </a:p>
         </p:txBody>
@@ -6897,6 +8362,47 @@
           <a:bodyPr/>
           <a:lstStyle/>
           <a:p>
+            <a:pPr lvl="0"/>
+            <a:r>
+              <a:rPr lang="en-US" dirty="0"/>
+              <a:t>Start with a sport concern or decision.</a:t>
+            </a:r>
+          </a:p>
+          <a:p>
+            <a:pPr lvl="0"/>
+            <a:r>
+              <a:rPr lang="en-US" dirty="0"/>
+              <a:t>Define the outcome, comparison, and context.</a:t>
+            </a:r>
+          </a:p>
+          <a:p>
+            <a:pPr lvl="0"/>
+            <a:r>
+              <a:rPr lang="en-US" dirty="0"/>
+              <a:t>Use causal language only when the evidence supports it.</a:t>
+            </a:r>
+          </a:p>
+          <a:p>
+            <a:pPr lvl="0"/>
+            <a:r>
+              <a:rPr lang="en-US" dirty="0"/>
+              <a:t>Let feasibility refine the scope without replacing the purpose.</a:t>
+            </a:r>
+          </a:p>
+          <a:p>
+            <a:pPr lvl="0"/>
+            <a:r>
+              <a:rPr lang="en-US" dirty="0"/>
+              <a:t>Treat limitations as part of the answer.</a:t>
+            </a:r>
+          </a:p>
+          <a:p>
+            <a:r>
+              <a:rPr lang="en-US" dirty="0"/>
+              <a:t>Next: at-home case study (generate question and identify dataset)</a:t>
+            </a:r>
+          </a:p>
+          <a:p>
             <a:endParaRPr lang="en-US" dirty="0"/>
           </a:p>
         </p:txBody>
@@ -7440,7 +8946,7 @@
           <a:lstStyle/>
           <a:p>
             <a:r>
-              <a:rPr lang="en-US" sz="2100" b="1" i="0" dirty="0">
+              <a:rPr lang="en-US" sz="2100" i="0" dirty="0">
                 <a:solidFill>
                   <a:srgbClr val="841617"/>
                 </a:solidFill>
@@ -7946,7 +9452,15 @@
             </a:pPr>
             <a:r>
               <a:rPr lang="en-US" dirty="0"/>
-              <a:t>Useful questions define enough context to make the answer interpretable.</a:t>
+              <a:t>Useful questions define </a:t>
+            </a:r>
+            <a:r>
+              <a:rPr lang="en-US" u="sng" dirty="0"/>
+              <a:t>just enough</a:t>
+            </a:r>
+            <a:r>
+              <a:rPr lang="en-US" dirty="0"/>
+              <a:t> context to make the answer interpretable.</a:t>
             </a:r>
           </a:p>
         </p:txBody>
@@ -8074,21 +9588,21 @@
             <a:pPr lvl="1"/>
             <a:r>
               <a:rPr lang="en-US" dirty="0"/>
-              <a:t>Outcome: scoring efficiency</a:t>
+              <a:t>Outcome = scoring efficiency</a:t>
             </a:r>
           </a:p>
           <a:p>
             <a:pPr lvl="1"/>
             <a:r>
               <a:rPr lang="en-US" dirty="0"/>
-              <a:t>Comparison: fourth quarter versus earlier quarters</a:t>
+              <a:t>Comparison = fourth quarter versus earlier quarters</a:t>
             </a:r>
           </a:p>
           <a:p>
             <a:pPr lvl="1"/>
             <a:r>
               <a:rPr lang="en-US" dirty="0"/>
-              <a:t>Context: conference games</a:t>
+              <a:t>Context = conference games</a:t>
             </a:r>
           </a:p>
         </p:txBody>
@@ -8283,6 +9797,49 @@
               <a:rPr lang="en-US" dirty="0"/>
               <a:t>and is the pattern different in close games?</a:t>
             </a:r>
+          </a:p>
+        </p:txBody>
+      </p:sp>
+      <p:sp>
+        <p:nvSpPr>
+          <p:cNvPr id="9" name="TextBox 8">
+            <a:extLst>
+              <a:ext uri="{FF2B5EF4-FFF2-40B4-BE49-F238E27FC236}">
+                <a16:creationId xmlns:a16="http://schemas.microsoft.com/office/drawing/2014/main" id="{BEFD210B-0F34-EF90-47BA-D523E2F06334}"/>
+              </a:ext>
+            </a:extLst>
+          </p:cNvPr>
+          <p:cNvSpPr txBox="1"/>
+          <p:nvPr/>
+        </p:nvSpPr>
+        <p:spPr>
+          <a:xfrm>
+            <a:off x="571500" y="6018014"/>
+            <a:ext cx="11049000" cy="415498"/>
+          </a:xfrm>
+          <a:prstGeom prst="rect">
+            <a:avLst/>
+          </a:prstGeom>
+          <a:noFill/>
+        </p:spPr>
+        <p:txBody>
+          <a:bodyPr wrap="square">
+            <a:spAutoFit/>
+          </a:bodyPr>
+          <a:lstStyle/>
+          <a:p>
+            <a:pPr algn="ctr"/>
+            <a:r>
+              <a:rPr lang="en-US" sz="2100" i="0" dirty="0">
+                <a:solidFill>
+                  <a:srgbClr val="841617"/>
+                </a:solidFill>
+                <a:effectLst/>
+                <a:latin typeface="Fira Sans" panose="020B0503050000020004" pitchFamily="34" charset="0"/>
+              </a:rPr>
+              <a:t>What else needs to be resolved?</a:t>
+            </a:r>
+            <a:endParaRPr lang="en-US" dirty="0"/>
           </a:p>
         </p:txBody>
       </p:sp>
